--- a/EFE-Egypt-Presentation.pptx
+++ b/EFE-Egypt-Presentation.pptx
@@ -4,6 +4,9 @@
   <p:sldMasterIdLst>
     <p:sldMasterId id="2147483648" r:id="rId1"/>
   </p:sldMasterIdLst>
+  <p:notesMasterIdLst>
+    <p:notesMasterId r:id="rId15"/>
+  </p:notesMasterIdLst>
   <p:sldIdLst>
     <p:sldId id="256" r:id="rId2"/>
     <p:sldId id="257" r:id="rId3"/>
@@ -19,9 +22,6 @@
     <p:sldId id="267" r:id="rId13"/>
     <p:sldId id="268" r:id="rId14"/>
   </p:sldIdLst>
-  <p:notesMasterIdLst>
-    <p:notesMasterId r:id="rId15"/>
-  </p:notesMasterIdLst>
   <p:sldSz cx="12192000" cy="6858000"/>
   <p:notesSz cx="6858000" cy="12192000"/>
   <p:defaultTextStyle>
@@ -116,6 +116,11 @@
       </a:defRPr>
     </a:lvl9pPr>
   </p:defaultTextStyle>
+  <p:extLst>
+    <p:ext uri="{EFAFB233-063F-42B5-8137-9DF3F51BA10A}">
+      <p15:sldGuideLst xmlns:p15="http://schemas.microsoft.com/office/powerpoint/2012/main"/>
+    </p:ext>
+  </p:extLst>
 </p:presentation>
 </file>
 
@@ -141,234 +146,10 @@
           <a:chExt cx="0" cy="0"/>
         </a:xfrm>
       </p:grpSpPr>
-      <p:sp>
-        <p:nvSpPr>
-          <p:cNvPr id="2" name="Header Placeholder 1"/>
-          <p:cNvSpPr>
-            <a:spLocks noGrp="1"/>
-          </p:cNvSpPr>
-          <p:nvPr>
-            <p:ph type="hdr" sz="quarter"/>
-          </p:nvPr>
-        </p:nvSpPr>
-        <p:spPr>
-          <a:xfrm>
-            <a:off x="0" y="0"/>
-            <a:ext cx="2971800" cy="458788"/>
-          </a:xfrm>
-          <a:prstGeom prst="rect">
-            <a:avLst/>
-          </a:prstGeom>
-        </p:spPr>
-        <p:txBody>
-          <a:bodyPr vert="horz" lIns="91440" tIns="45720" rIns="91440" bIns="45720" rtlCol="0"/>
-          <a:lstStyle>
-            <a:lvl1pPr algn="l">
-              <a:defRPr sz="1200"/>
-            </a:lvl1pPr>
-          </a:lstStyle>
-          <a:p>
-            <a:endParaRPr lang="en-US"/>
-          </a:p>
-        </p:txBody>
-      </p:sp>
-      <p:sp>
-        <p:nvSpPr>
-          <p:cNvPr id="3" name="Date Placeholder 2"/>
-          <p:cNvSpPr>
-            <a:spLocks noGrp="1"/>
-          </p:cNvSpPr>
-          <p:nvPr>
-            <p:ph type="dt" idx="1"/>
-          </p:nvPr>
-        </p:nvSpPr>
-        <p:spPr>
-          <a:xfrm>
-            <a:off x="3884613" y="0"/>
-            <a:ext cx="2971800" cy="458788"/>
-          </a:xfrm>
-          <a:prstGeom prst="rect">
-            <a:avLst/>
-          </a:prstGeom>
-        </p:spPr>
-        <p:txBody>
-          <a:bodyPr vert="horz" lIns="91440" tIns="45720" rIns="91440" bIns="45720" rtlCol="0"/>
-          <a:lstStyle>
-            <a:lvl1pPr algn="r">
-              <a:defRPr sz="1200"/>
-            </a:lvl1pPr>
-          </a:lstStyle>
-          <a:p>
-            <a:fld id="{5282F153-3F37-0F45-9E97-73ACFA13230C}" type="datetimeFigureOut">
-              <a:rPr lang="en-US"/>
-              <a:t>7/23/19</a:t>
-            </a:fld>
-            <a:endParaRPr lang="en-US"/>
-          </a:p>
-        </p:txBody>
-      </p:sp>
-      <p:sp>
-        <p:nvSpPr>
-          <p:cNvPr id="4" name="Slide Image Placeholder 3"/>
-          <p:cNvSpPr>
-            <a:spLocks noGrp="1" noRot="1" noChangeAspect="1"/>
-          </p:cNvSpPr>
-          <p:nvPr>
-            <p:ph type="sldImg" idx="2"/>
-          </p:nvPr>
-        </p:nvSpPr>
-        <p:spPr>
-          <a:xfrm>
-            <a:off x="685800" y="1143000"/>
-            <a:ext cx="5486400" cy="3086100"/>
-          </a:xfrm>
-          <a:prstGeom prst="rect">
-            <a:avLst/>
-          </a:prstGeom>
-          <a:noFill/>
-          <a:ln w="12700">
-            <a:solidFill>
-              <a:prstClr val="black"/>
-            </a:solidFill>
-          </a:ln>
-        </p:spPr>
-        <p:txBody>
-          <a:bodyPr vert="horz" lIns="91440" tIns="45720" rIns="91440" bIns="45720" rtlCol="0" anchor="ctr"/>
-          <a:lstStyle/>
-          <a:p>
-            <a:endParaRPr lang="en-US"/>
-          </a:p>
-        </p:txBody>
-      </p:sp>
-      <p:sp>
-        <p:nvSpPr>
-          <p:cNvPr id="5" name="Notes Placeholder 4"/>
-          <p:cNvSpPr>
-            <a:spLocks noGrp="1"/>
-          </p:cNvSpPr>
-          <p:nvPr>
-            <p:ph type="body" sz="quarter" idx="3"/>
-          </p:nvPr>
-        </p:nvSpPr>
-        <p:spPr>
-          <a:xfrm>
-            <a:off x="685800" y="4400550"/>
-            <a:ext cx="5486400" cy="3600450"/>
-          </a:xfrm>
-          <a:prstGeom prst="rect">
-            <a:avLst/>
-          </a:prstGeom>
-        </p:spPr>
-        <p:txBody>
-          <a:bodyPr vert="horz" lIns="91440" tIns="45720" rIns="91440" bIns="45720" rtlCol="0"/>
-          <a:lstStyle/>
-          <a:p>
-            <a:pPr lvl="0"/>
-            <a:r>
-              <a:rPr lang="en-US"/>
-              <a:t>Click to edit Master text styles</a:t>
-            </a:r>
-          </a:p>
-          <a:p>
-            <a:pPr lvl="1"/>
-            <a:r>
-              <a:rPr lang="en-US"/>
-              <a:t>Second level</a:t>
-            </a:r>
-          </a:p>
-          <a:p>
-            <a:pPr lvl="2"/>
-            <a:r>
-              <a:rPr lang="en-US"/>
-              <a:t>Third level</a:t>
-            </a:r>
-          </a:p>
-          <a:p>
-            <a:pPr lvl="3"/>
-            <a:r>
-              <a:rPr lang="en-US"/>
-              <a:t>Fourth level</a:t>
-            </a:r>
-          </a:p>
-          <a:p>
-            <a:pPr lvl="4"/>
-            <a:r>
-              <a:rPr lang="en-US"/>
-              <a:t>Fifth level</a:t>
-            </a:r>
-          </a:p>
-        </p:txBody>
-      </p:sp>
-      <p:sp>
-        <p:nvSpPr>
-          <p:cNvPr id="6" name="Footer Placeholder 5"/>
-          <p:cNvSpPr>
-            <a:spLocks noGrp="1"/>
-          </p:cNvSpPr>
-          <p:nvPr>
-            <p:ph type="ftr" sz="quarter" idx="4"/>
-          </p:nvPr>
-        </p:nvSpPr>
-        <p:spPr>
-          <a:xfrm>
-            <a:off x="0" y="8685213"/>
-            <a:ext cx="2971800" cy="458787"/>
-          </a:xfrm>
-          <a:prstGeom prst="rect">
-            <a:avLst/>
-          </a:prstGeom>
-        </p:spPr>
-        <p:txBody>
-          <a:bodyPr vert="horz" lIns="91440" tIns="45720" rIns="91440" bIns="45720" rtlCol="0" anchor="b"/>
-          <a:lstStyle>
-            <a:lvl1pPr algn="l">
-              <a:defRPr sz="1200"/>
-            </a:lvl1pPr>
-          </a:lstStyle>
-          <a:p>
-            <a:endParaRPr lang="en-US"/>
-          </a:p>
-        </p:txBody>
-      </p:sp>
-      <p:sp>
-        <p:nvSpPr>
-          <p:cNvPr id="7" name="Slide Number Placeholder 6"/>
-          <p:cNvSpPr>
-            <a:spLocks noGrp="1"/>
-          </p:cNvSpPr>
-          <p:nvPr>
-            <p:ph type="sldNum" sz="quarter" idx="5"/>
-          </p:nvPr>
-        </p:nvSpPr>
-        <p:spPr>
-          <a:xfrm>
-            <a:off x="3884613" y="8685213"/>
-            <a:ext cx="2971800" cy="458787"/>
-          </a:xfrm>
-          <a:prstGeom prst="rect">
-            <a:avLst/>
-          </a:prstGeom>
-        </p:spPr>
-        <p:txBody>
-          <a:bodyPr vert="horz" lIns="91440" tIns="45720" rIns="91440" bIns="45720" rtlCol="0" anchor="b"/>
-          <a:lstStyle>
-            <a:lvl1pPr algn="r">
-              <a:defRPr sz="1200"/>
-            </a:lvl1pPr>
-          </a:lstStyle>
-          <a:p>
-            <a:fld id="{CE5E9CC1-C706-0F49-92D6-E571CC5EEA8F}" type="slidenum">
-              <a:rPr lang="en-US"/>
-              <a:t>‹#›</a:t>
-            </a:fld>
-            <a:endParaRPr lang="en-US"/>
-          </a:p>
-        </p:txBody>
-      </p:sp>
     </p:spTree>
     <p:extLst>
       <p:ext uri="{BB962C8B-B14F-4D97-AF65-F5344CB8AC3E}">
-        <p14:creationId xmlns:p14="http://schemas.microsoft.com/office/powerpoint/2010/main" val="1024086991"/>
+        <p14:creationId xmlns:p14="http://schemas.microsoft.com/office/powerpoint/2010/main" val="2949085933"/>
       </p:ext>
     </p:extLst>
   </p:cSld>
@@ -516,7 +297,6 @@
               <a:rPr lang="en-US" dirty="0"/>
               <a:t>افتتاحية العرض. هذا مشروع تقديرٍ شخصي لمؤسسة EFE‑Egypt — موقع رقمي احترافي يوثّق الشكر لكل من ساهم في رحلة التدريب والتطوير.</a:t>
             </a:r>
-            <a:endParaRPr lang="en-US" dirty="0"/>
           </a:p>
         </p:txBody>
       </p:sp>
@@ -604,7 +384,6 @@
               <a:rPr lang="en-US" dirty="0"/>
               <a:t>أربعة برامج: التدريب على التوظيف JPTP، التوجيه المهني، المهارات التقنية والرقمية، ثم التوظيف ودعم الخرّيجين.</a:t>
             </a:r>
-            <a:endParaRPr lang="en-US" dirty="0"/>
           </a:p>
         </p:txBody>
       </p:sp>
@@ -692,7 +471,6 @@
               <a:rPr lang="en-US" dirty="0"/>
               <a:t>الأثر الشخصي (Attitude): المهارة التقنية، العقلية المهنية، الجاهزية للسوق، والامتنان كدافع. الرسالة: الموقف الصحيح + الإتقان = النجاح.</a:t>
             </a:r>
-            <a:endParaRPr lang="en-US" dirty="0"/>
           </a:p>
         </p:txBody>
       </p:sp>
@@ -780,7 +558,6 @@
               <a:rPr lang="en-US" dirty="0"/>
               <a:t>الخاتمة: التزامٌ بحمل ما تعلّمته، ووعدٌ بأن يكون عند حسن الظن، مع شكرٍ ختامي موقّع.</a:t>
             </a:r>
-            <a:endParaRPr lang="en-US" dirty="0"/>
           </a:p>
         </p:txBody>
       </p:sp>
@@ -868,7 +645,6 @@
               <a:rPr lang="en-US" dirty="0"/>
               <a:t>سلايد الختام: شكرٌ موجزٌ وأنيق مع التوقيع والمسمّى المهني.</a:t>
             </a:r>
-            <a:endParaRPr lang="en-US" dirty="0"/>
           </a:p>
         </p:txBody>
       </p:sp>
@@ -956,7 +732,6 @@
               <a:rPr lang="en-US" dirty="0"/>
               <a:t>أربعة محاور: الدافع (الامتنان)، الفكرة (التنفيذ الرقمي)، الرسالة (قيمة الاهتمام بالإنسان)، والعِلم (تحويل ما تعلّمته إلى رسالةٍ وفكرةٍ تُشارَك).</a:t>
             </a:r>
-            <a:endParaRPr lang="en-US" dirty="0"/>
           </a:p>
         </p:txBody>
       </p:sp>
@@ -1044,7 +819,6 @@
               <a:rPr lang="en-US" dirty="0"/>
               <a:t>أجندة العرض: ثمانية محاور تغطّي كل أقسام الموقع من رسالة الشكر حتى الأثر الشخصي والخاتمة.</a:t>
             </a:r>
-            <a:endParaRPr lang="en-US" dirty="0"/>
           </a:p>
         </p:txBody>
       </p:sp>
@@ -1132,7 +906,6 @@
               <a:rPr lang="en-US" dirty="0"/>
               <a:t>الرسالة المحورية للموقع: الشكر على الاهتمام بالمهندسين وتطويرهم — لا مجرد إتاحة فرصة، بل بناء جاهزية وثقة.</a:t>
             </a:r>
-            <a:endParaRPr lang="en-US" dirty="0"/>
           </a:p>
         </p:txBody>
       </p:sp>
@@ -1220,7 +993,6 @@
               <a:rPr lang="en-US" dirty="0"/>
               <a:t>خطاب التقدير الموجّه لأسرة المؤسسة، مقتطفٌ من نصّ الموقع، وموقّع باسم ALnaqib.</a:t>
             </a:r>
-            <a:endParaRPr lang="en-US" dirty="0"/>
           </a:p>
         </p:txBody>
       </p:sp>
@@ -1308,7 +1080,6 @@
               <a:rPr lang="en-US" dirty="0"/>
               <a:t>ثلاث مجموعات: مدرّبو المهارات الناعمة (د. سيف العقاد، د. شاكورا الزعفراني)، مدرّبو DevOps (م. جمال محمد، م. عبدالرحمن أحمد)، والإدارة والتنظيم (م. شهد جمال).</a:t>
             </a:r>
-            <a:endParaRPr lang="en-US" dirty="0"/>
           </a:p>
         </p:txBody>
       </p:sp>
@@ -1396,7 +1167,6 @@
               <a:rPr lang="en-US" dirty="0"/>
               <a:t>Senior Academy — المكان المستضيف للتدريب. وشكرٌ خاص لمن تولّيا التنظيم والإدارة: م. يحيى ممتاز و م. ناريمان خطاب.</a:t>
             </a:r>
-            <a:endParaRPr lang="en-US" dirty="0"/>
           </a:p>
         </p:txBody>
       </p:sp>
@@ -1484,7 +1254,6 @@
               <a:rPr lang="en-US" dirty="0"/>
               <a:t>تعريف موجز بمؤسسة EFE‑Egypt: غير ربحية، تأسست 2008، جزء من شبكة EFE في MENA، وتعمل في عدة مدن مصرية.</a:t>
             </a:r>
-            <a:endParaRPr lang="en-US" dirty="0"/>
           </a:p>
         </p:txBody>
       </p:sp>
@@ -1572,7 +1341,6 @@
               <a:rPr lang="en-US" dirty="0"/>
               <a:t>الأثر بالأرقام: أكثر من 7000 متدرّب، 80% توظيف، 78% استمرار في العمل، 54% مشاركة نساء — منذ التأسيس عام 2008.</a:t>
             </a:r>
-            <a:endParaRPr lang="en-US" dirty="0"/>
           </a:p>
         </p:txBody>
       </p:sp>
@@ -1645,6 +1413,11 @@
 <file path=ppt/slideMasters/slideMaster1.xml><?xml version="1.0" encoding="utf-8"?>
 <p:sldMaster xmlns:a="http://schemas.openxmlformats.org/drawingml/2006/main" xmlns:r="http://schemas.openxmlformats.org/officeDocument/2006/relationships" xmlns:p="http://schemas.openxmlformats.org/presentationml/2006/main">
   <p:cSld>
+    <p:bg>
+      <p:bgRef idx="1001">
+        <a:schemeClr val="bg1"/>
+      </p:bgRef>
+    </p:bg>
     <p:spTree>
       <p:nvGrpSpPr>
         <p:cNvPr id="1" name=""/>
@@ -1925,7 +1698,7 @@
     <p:bg>
       <p:bgPr>
         <a:blipFill dpi="0" rotWithShape="1">
-          <a:blip r:embed="rId1">
+          <a:blip r:embed="rId3">
             <a:lum/>
           </a:blip>
           <a:srcRect/>
@@ -1969,6 +1742,13 @@
           </a:solidFill>
           <a:ln/>
         </p:spPr>
+        <p:txBody>
+          <a:bodyPr/>
+          <a:lstStyle/>
+          <a:p>
+            <a:endParaRPr lang="en-US"/>
+          </a:p>
+        </p:txBody>
       </p:sp>
       <p:sp>
         <p:nvSpPr>
@@ -1991,11 +1771,11 @@
           <a:bodyPr wrap="square" rtlCol="0" anchor="ctr"/>
           <a:lstStyle/>
           <a:p>
-            <a:pPr algn="ctr" indent="0" marL="0">
-              <a:buNone/>
-            </a:pPr>
-            <a:r>
-              <a:rPr lang="en-US" sz="1500" b="1" spc="400" kern="0" dirty="0">
+            <a:pPr marL="0" indent="0" algn="ctr">
+              <a:buNone/>
+            </a:pPr>
+            <a:r>
+              <a:rPr lang="en-US" sz="1500" b="1" kern="0" spc="400" dirty="0">
                 <a:solidFill>
                   <a:srgbClr val="C9A227"/>
                 </a:solidFill>
@@ -2030,7 +1810,7 @@
           <a:bodyPr wrap="square" rtlCol="0" anchor="ctr"/>
           <a:lstStyle/>
           <a:p>
-            <a:pPr rtl="1" algn="ctr" indent="0" marL="0">
+            <a:pPr marL="0" indent="0" algn="ctr" rtl="1">
               <a:buNone/>
             </a:pPr>
             <a:r>
@@ -2069,7 +1849,7 @@
           <a:bodyPr wrap="square" rtlCol="0" anchor="ctr"/>
           <a:lstStyle/>
           <a:p>
-            <a:pPr rtl="1" algn="ctr" indent="0" marL="0">
+            <a:pPr marL="0" indent="0" algn="ctr" rtl="1">
               <a:buNone/>
             </a:pPr>
             <a:r>
@@ -2109,6 +1889,13 @@
             <a:prstDash val="solid"/>
           </a:ln>
         </p:spPr>
+        <p:txBody>
+          <a:bodyPr/>
+          <a:lstStyle/>
+          <a:p>
+            <a:endParaRPr lang="en-US"/>
+          </a:p>
+        </p:txBody>
       </p:sp>
       <p:sp>
         <p:nvSpPr>
@@ -2131,7 +1918,7 @@
           <a:bodyPr wrap="square" rtlCol="0" anchor="ctr"/>
           <a:lstStyle/>
           <a:p>
-            <a:pPr algn="ctr" indent="0" marL="0">
+            <a:pPr marL="0" indent="0" algn="ctr">
               <a:buNone/>
             </a:pPr>
             <a:r>
@@ -2170,7 +1957,7 @@
           <a:bodyPr wrap="square" rtlCol="0" anchor="ctr"/>
           <a:lstStyle/>
           <a:p>
-            <a:pPr rtl="1" algn="ctr" indent="0" marL="0">
+            <a:pPr marL="0" indent="0" algn="ctr" rtl="1">
               <a:buNone/>
             </a:pPr>
             <a:r>
@@ -2202,7 +1989,7 @@
     <p:bg>
       <p:bgPr>
         <a:blipFill dpi="0" rotWithShape="1">
-          <a:blip r:embed="rId1">
+          <a:blip r:embed="rId3">
             <a:lum/>
           </a:blip>
           <a:srcRect/>
@@ -2248,7 +2035,7 @@
           <a:bodyPr wrap="square" lIns="0" tIns="0" rIns="0" bIns="0" rtlCol="0" anchor="ctr"/>
           <a:lstStyle/>
           <a:p>
-            <a:pPr rtl="1" algn="r" indent="0" marL="0">
+            <a:pPr marL="0" indent="0" algn="r" rtl="1">
               <a:buNone/>
             </a:pPr>
             <a:r>
@@ -2287,7 +2074,7 @@
           <a:bodyPr wrap="square" rtlCol="0" anchor="ctr"/>
           <a:lstStyle/>
           <a:p>
-            <a:pPr rtl="1" algn="r" indent="0" marL="0">
+            <a:pPr marL="0" indent="0" algn="r" rtl="1">
               <a:buNone/>
             </a:pPr>
             <a:r>
@@ -2331,13 +2118,20 @@
             <a:prstDash val="solid"/>
           </a:ln>
           <a:effectLst>
-            <a:outerShdw sx="100000" sy="100000" kx="0" ky="0" algn="bl" rotWithShape="0" blurRad="114300" dist="38100" dir="5400000">
+            <a:outerShdw blurRad="114300" dist="38100" dir="5400000" algn="bl" rotWithShape="0">
               <a:srgbClr val="000000">
                 <a:alpha val="34000"/>
               </a:srgbClr>
             </a:outerShdw>
           </a:effectLst>
         </p:spPr>
+        <p:txBody>
+          <a:bodyPr/>
+          <a:lstStyle/>
+          <a:p>
+            <a:endParaRPr lang="en-US"/>
+          </a:p>
+        </p:txBody>
       </p:sp>
       <p:sp>
         <p:nvSpPr>
@@ -2360,7 +2154,7 @@
           <a:bodyPr wrap="square" lIns="0" tIns="0" rIns="0" bIns="0" rtlCol="0" anchor="ctr"/>
           <a:lstStyle/>
           <a:p>
-            <a:pPr algn="r" indent="0" marL="0">
+            <a:pPr marL="0" indent="0" algn="r">
               <a:buNone/>
             </a:pPr>
             <a:r>
@@ -2399,7 +2193,7 @@
           <a:bodyPr wrap="square" lIns="0" tIns="0" rIns="0" bIns="0" rtlCol="0" anchor="ctr"/>
           <a:lstStyle/>
           <a:p>
-            <a:pPr rtl="1" algn="r" indent="0" marL="0">
+            <a:pPr marL="0" indent="0" algn="r" rtl="1">
               <a:buNone/>
             </a:pPr>
             <a:r>
@@ -2438,7 +2232,7 @@
           <a:bodyPr wrap="square" lIns="0" tIns="0" rIns="0" bIns="0" rtlCol="0" anchor="t"/>
           <a:lstStyle/>
           <a:p>
-            <a:pPr rtl="1" algn="r" indent="0" marL="0">
+            <a:pPr marL="0" indent="0" algn="r" rtl="1">
               <a:lnSpc>
                 <a:spcPct val="118000"/>
               </a:lnSpc>
@@ -2485,13 +2279,20 @@
             <a:prstDash val="solid"/>
           </a:ln>
           <a:effectLst>
-            <a:outerShdw sx="100000" sy="100000" kx="0" ky="0" algn="bl" rotWithShape="0" blurRad="114300" dist="38100" dir="5400000">
+            <a:outerShdw blurRad="114300" dist="38100" dir="5400000" algn="bl" rotWithShape="0">
               <a:srgbClr val="000000">
                 <a:alpha val="34000"/>
               </a:srgbClr>
             </a:outerShdw>
           </a:effectLst>
         </p:spPr>
+        <p:txBody>
+          <a:bodyPr/>
+          <a:lstStyle/>
+          <a:p>
+            <a:endParaRPr lang="en-US"/>
+          </a:p>
+        </p:txBody>
       </p:sp>
       <p:sp>
         <p:nvSpPr>
@@ -2514,7 +2315,7 @@
           <a:bodyPr wrap="square" lIns="0" tIns="0" rIns="0" bIns="0" rtlCol="0" anchor="ctr"/>
           <a:lstStyle/>
           <a:p>
-            <a:pPr algn="r" indent="0" marL="0">
+            <a:pPr marL="0" indent="0" algn="r">
               <a:buNone/>
             </a:pPr>
             <a:r>
@@ -2553,7 +2354,7 @@
           <a:bodyPr wrap="square" lIns="0" tIns="0" rIns="0" bIns="0" rtlCol="0" anchor="ctr"/>
           <a:lstStyle/>
           <a:p>
-            <a:pPr rtl="1" algn="r" indent="0" marL="0">
+            <a:pPr marL="0" indent="0" algn="r" rtl="1">
               <a:buNone/>
             </a:pPr>
             <a:r>
@@ -2592,7 +2393,7 @@
           <a:bodyPr wrap="square" lIns="0" tIns="0" rIns="0" bIns="0" rtlCol="0" anchor="t"/>
           <a:lstStyle/>
           <a:p>
-            <a:pPr rtl="1" algn="r" indent="0" marL="0">
+            <a:pPr marL="0" indent="0" algn="r" rtl="1">
               <a:lnSpc>
                 <a:spcPct val="118000"/>
               </a:lnSpc>
@@ -2639,13 +2440,20 @@
             <a:prstDash val="solid"/>
           </a:ln>
           <a:effectLst>
-            <a:outerShdw sx="100000" sy="100000" kx="0" ky="0" algn="bl" rotWithShape="0" blurRad="114300" dist="38100" dir="5400000">
+            <a:outerShdw blurRad="114300" dist="38100" dir="5400000" algn="bl" rotWithShape="0">
               <a:srgbClr val="000000">
                 <a:alpha val="34000"/>
               </a:srgbClr>
             </a:outerShdw>
           </a:effectLst>
         </p:spPr>
+        <p:txBody>
+          <a:bodyPr/>
+          <a:lstStyle/>
+          <a:p>
+            <a:endParaRPr lang="en-US"/>
+          </a:p>
+        </p:txBody>
       </p:sp>
       <p:sp>
         <p:nvSpPr>
@@ -2668,7 +2476,7 @@
           <a:bodyPr wrap="square" lIns="0" tIns="0" rIns="0" bIns="0" rtlCol="0" anchor="ctr"/>
           <a:lstStyle/>
           <a:p>
-            <a:pPr algn="r" indent="0" marL="0">
+            <a:pPr marL="0" indent="0" algn="r">
               <a:buNone/>
             </a:pPr>
             <a:r>
@@ -2707,7 +2515,7 @@
           <a:bodyPr wrap="square" lIns="0" tIns="0" rIns="0" bIns="0" rtlCol="0" anchor="ctr"/>
           <a:lstStyle/>
           <a:p>
-            <a:pPr rtl="1" algn="r" indent="0" marL="0">
+            <a:pPr marL="0" indent="0" algn="r" rtl="1">
               <a:buNone/>
             </a:pPr>
             <a:r>
@@ -2746,7 +2554,7 @@
           <a:bodyPr wrap="square" lIns="0" tIns="0" rIns="0" bIns="0" rtlCol="0" anchor="t"/>
           <a:lstStyle/>
           <a:p>
-            <a:pPr rtl="1" algn="r" indent="0" marL="0">
+            <a:pPr marL="0" indent="0" algn="r" rtl="1">
               <a:lnSpc>
                 <a:spcPct val="118000"/>
               </a:lnSpc>
@@ -2793,13 +2601,20 @@
             <a:prstDash val="solid"/>
           </a:ln>
           <a:effectLst>
-            <a:outerShdw sx="100000" sy="100000" kx="0" ky="0" algn="bl" rotWithShape="0" blurRad="114300" dist="38100" dir="5400000">
+            <a:outerShdw blurRad="114300" dist="38100" dir="5400000" algn="bl" rotWithShape="0">
               <a:srgbClr val="000000">
                 <a:alpha val="34000"/>
               </a:srgbClr>
             </a:outerShdw>
           </a:effectLst>
         </p:spPr>
+        <p:txBody>
+          <a:bodyPr/>
+          <a:lstStyle/>
+          <a:p>
+            <a:endParaRPr lang="en-US"/>
+          </a:p>
+        </p:txBody>
       </p:sp>
       <p:sp>
         <p:nvSpPr>
@@ -2822,7 +2637,7 @@
           <a:bodyPr wrap="square" lIns="0" tIns="0" rIns="0" bIns="0" rtlCol="0" anchor="ctr"/>
           <a:lstStyle/>
           <a:p>
-            <a:pPr algn="r" indent="0" marL="0">
+            <a:pPr marL="0" indent="0" algn="r">
               <a:buNone/>
             </a:pPr>
             <a:r>
@@ -2861,7 +2676,7 @@
           <a:bodyPr wrap="square" lIns="0" tIns="0" rIns="0" bIns="0" rtlCol="0" anchor="ctr"/>
           <a:lstStyle/>
           <a:p>
-            <a:pPr rtl="1" algn="r" indent="0" marL="0">
+            <a:pPr marL="0" indent="0" algn="r" rtl="1">
               <a:buNone/>
             </a:pPr>
             <a:r>
@@ -2900,7 +2715,7 @@
           <a:bodyPr wrap="square" lIns="0" tIns="0" rIns="0" bIns="0" rtlCol="0" anchor="t"/>
           <a:lstStyle/>
           <a:p>
-            <a:pPr rtl="1" algn="r" indent="0" marL="0">
+            <a:pPr marL="0" indent="0" algn="r" rtl="1">
               <a:lnSpc>
                 <a:spcPct val="118000"/>
               </a:lnSpc>
@@ -2942,7 +2757,7 @@
           <a:bodyPr wrap="square" lIns="0" tIns="0" rIns="0" bIns="0" rtlCol="0" anchor="ctr"/>
           <a:lstStyle/>
           <a:p>
-            <a:pPr algn="r" indent="0" marL="0">
+            <a:pPr marL="0" indent="0" algn="r">
               <a:buNone/>
             </a:pPr>
             <a:r>
@@ -2981,7 +2796,7 @@
           <a:bodyPr wrap="square" lIns="0" tIns="0" rIns="0" bIns="0" rtlCol="0" anchor="ctr"/>
           <a:lstStyle/>
           <a:p>
-            <a:pPr algn="l" indent="0" marL="0">
+            <a:pPr marL="0" indent="0" algn="l">
               <a:buNone/>
             </a:pPr>
             <a:r>
@@ -3013,7 +2828,7 @@
     <p:bg>
       <p:bgPr>
         <a:blipFill dpi="0" rotWithShape="1">
-          <a:blip r:embed="rId1">
+          <a:blip r:embed="rId3">
             <a:lum/>
           </a:blip>
           <a:srcRect/>
@@ -3059,7 +2874,7 @@
           <a:bodyPr wrap="square" lIns="0" tIns="0" rIns="0" bIns="0" rtlCol="0" anchor="ctr"/>
           <a:lstStyle/>
           <a:p>
-            <a:pPr rtl="1" algn="r" indent="0" marL="0">
+            <a:pPr marL="0" indent="0" algn="r" rtl="1">
               <a:buNone/>
             </a:pPr>
             <a:r>
@@ -3098,7 +2913,7 @@
           <a:bodyPr wrap="square" rtlCol="0" anchor="ctr"/>
           <a:lstStyle/>
           <a:p>
-            <a:pPr rtl="1" algn="r" indent="0" marL="0">
+            <a:pPr marL="0" indent="0" algn="r" rtl="1">
               <a:buNone/>
             </a:pPr>
             <a:r>
@@ -3142,13 +2957,20 @@
             <a:prstDash val="solid"/>
           </a:ln>
           <a:effectLst>
-            <a:outerShdw sx="100000" sy="100000" kx="0" ky="0" algn="bl" rotWithShape="0" blurRad="114300" dist="38100" dir="5400000">
+            <a:outerShdw blurRad="114300" dist="38100" dir="5400000" algn="bl" rotWithShape="0">
               <a:srgbClr val="000000">
                 <a:alpha val="34000"/>
               </a:srgbClr>
             </a:outerShdw>
           </a:effectLst>
         </p:spPr>
+        <p:txBody>
+          <a:bodyPr/>
+          <a:lstStyle/>
+          <a:p>
+            <a:endParaRPr lang="en-US"/>
+          </a:p>
+        </p:txBody>
       </p:sp>
       <p:sp>
         <p:nvSpPr>
@@ -3169,6 +2991,13 @@
           </a:solidFill>
           <a:ln/>
         </p:spPr>
+        <p:txBody>
+          <a:bodyPr/>
+          <a:lstStyle/>
+          <a:p>
+            <a:endParaRPr lang="en-US"/>
+          </a:p>
+        </p:txBody>
       </p:sp>
       <p:sp>
         <p:nvSpPr>
@@ -3191,7 +3020,7 @@
           <a:bodyPr wrap="square" lIns="0" tIns="0" rIns="0" bIns="0" rtlCol="0" anchor="ctr"/>
           <a:lstStyle/>
           <a:p>
-            <a:pPr rtl="1" algn="r" indent="0" marL="0">
+            <a:pPr marL="0" indent="0" algn="r" rtl="1">
               <a:buNone/>
             </a:pPr>
             <a:r>
@@ -3230,7 +3059,7 @@
           <a:bodyPr wrap="square" lIns="0" tIns="0" rIns="0" bIns="0" rtlCol="0" anchor="t"/>
           <a:lstStyle/>
           <a:p>
-            <a:pPr rtl="1" algn="r" indent="0" marL="0">
+            <a:pPr marL="0" indent="0" algn="r" rtl="1">
               <a:lnSpc>
                 <a:spcPct val="115000"/>
               </a:lnSpc>
@@ -3277,13 +3106,20 @@
             <a:prstDash val="solid"/>
           </a:ln>
           <a:effectLst>
-            <a:outerShdw sx="100000" sy="100000" kx="0" ky="0" algn="bl" rotWithShape="0" blurRad="114300" dist="38100" dir="5400000">
+            <a:outerShdw blurRad="114300" dist="38100" dir="5400000" algn="bl" rotWithShape="0">
               <a:srgbClr val="000000">
                 <a:alpha val="34000"/>
               </a:srgbClr>
             </a:outerShdw>
           </a:effectLst>
         </p:spPr>
+        <p:txBody>
+          <a:bodyPr/>
+          <a:lstStyle/>
+          <a:p>
+            <a:endParaRPr lang="en-US"/>
+          </a:p>
+        </p:txBody>
       </p:sp>
       <p:sp>
         <p:nvSpPr>
@@ -3304,6 +3140,13 @@
           </a:solidFill>
           <a:ln/>
         </p:spPr>
+        <p:txBody>
+          <a:bodyPr/>
+          <a:lstStyle/>
+          <a:p>
+            <a:endParaRPr lang="en-US"/>
+          </a:p>
+        </p:txBody>
       </p:sp>
       <p:sp>
         <p:nvSpPr>
@@ -3326,7 +3169,7 @@
           <a:bodyPr wrap="square" lIns="0" tIns="0" rIns="0" bIns="0" rtlCol="0" anchor="ctr"/>
           <a:lstStyle/>
           <a:p>
-            <a:pPr rtl="1" algn="r" indent="0" marL="0">
+            <a:pPr marL="0" indent="0" algn="r" rtl="1">
               <a:buNone/>
             </a:pPr>
             <a:r>
@@ -3365,7 +3208,7 @@
           <a:bodyPr wrap="square" lIns="0" tIns="0" rIns="0" bIns="0" rtlCol="0" anchor="t"/>
           <a:lstStyle/>
           <a:p>
-            <a:pPr rtl="1" algn="r" indent="0" marL="0">
+            <a:pPr marL="0" indent="0" algn="r" rtl="1">
               <a:lnSpc>
                 <a:spcPct val="115000"/>
               </a:lnSpc>
@@ -3412,13 +3255,20 @@
             <a:prstDash val="solid"/>
           </a:ln>
           <a:effectLst>
-            <a:outerShdw sx="100000" sy="100000" kx="0" ky="0" algn="bl" rotWithShape="0" blurRad="114300" dist="38100" dir="5400000">
+            <a:outerShdw blurRad="114300" dist="38100" dir="5400000" algn="bl" rotWithShape="0">
               <a:srgbClr val="000000">
                 <a:alpha val="34000"/>
               </a:srgbClr>
             </a:outerShdw>
           </a:effectLst>
         </p:spPr>
+        <p:txBody>
+          <a:bodyPr/>
+          <a:lstStyle/>
+          <a:p>
+            <a:endParaRPr lang="en-US"/>
+          </a:p>
+        </p:txBody>
       </p:sp>
       <p:sp>
         <p:nvSpPr>
@@ -3439,6 +3289,13 @@
           </a:solidFill>
           <a:ln/>
         </p:spPr>
+        <p:txBody>
+          <a:bodyPr/>
+          <a:lstStyle/>
+          <a:p>
+            <a:endParaRPr lang="en-US"/>
+          </a:p>
+        </p:txBody>
       </p:sp>
       <p:sp>
         <p:nvSpPr>
@@ -3461,7 +3318,7 @@
           <a:bodyPr wrap="square" lIns="0" tIns="0" rIns="0" bIns="0" rtlCol="0" anchor="ctr"/>
           <a:lstStyle/>
           <a:p>
-            <a:pPr rtl="1" algn="r" indent="0" marL="0">
+            <a:pPr marL="0" indent="0" algn="r" rtl="1">
               <a:buNone/>
             </a:pPr>
             <a:r>
@@ -3500,7 +3357,7 @@
           <a:bodyPr wrap="square" lIns="0" tIns="0" rIns="0" bIns="0" rtlCol="0" anchor="t"/>
           <a:lstStyle/>
           <a:p>
-            <a:pPr rtl="1" algn="r" indent="0" marL="0">
+            <a:pPr marL="0" indent="0" algn="r" rtl="1">
               <a:lnSpc>
                 <a:spcPct val="115000"/>
               </a:lnSpc>
@@ -3547,13 +3404,20 @@
             <a:prstDash val="solid"/>
           </a:ln>
           <a:effectLst>
-            <a:outerShdw sx="100000" sy="100000" kx="0" ky="0" algn="bl" rotWithShape="0" blurRad="114300" dist="38100" dir="5400000">
+            <a:outerShdw blurRad="114300" dist="38100" dir="5400000" algn="bl" rotWithShape="0">
               <a:srgbClr val="000000">
                 <a:alpha val="34000"/>
               </a:srgbClr>
             </a:outerShdw>
           </a:effectLst>
         </p:spPr>
+        <p:txBody>
+          <a:bodyPr/>
+          <a:lstStyle/>
+          <a:p>
+            <a:endParaRPr lang="en-US"/>
+          </a:p>
+        </p:txBody>
       </p:sp>
       <p:sp>
         <p:nvSpPr>
@@ -3574,6 +3438,13 @@
           </a:solidFill>
           <a:ln/>
         </p:spPr>
+        <p:txBody>
+          <a:bodyPr/>
+          <a:lstStyle/>
+          <a:p>
+            <a:endParaRPr lang="en-US"/>
+          </a:p>
+        </p:txBody>
       </p:sp>
       <p:sp>
         <p:nvSpPr>
@@ -3596,7 +3467,7 @@
           <a:bodyPr wrap="square" lIns="0" tIns="0" rIns="0" bIns="0" rtlCol="0" anchor="ctr"/>
           <a:lstStyle/>
           <a:p>
-            <a:pPr rtl="1" algn="r" indent="0" marL="0">
+            <a:pPr marL="0" indent="0" algn="r" rtl="1">
               <a:buNone/>
             </a:pPr>
             <a:r>
@@ -3635,7 +3506,7 @@
           <a:bodyPr wrap="square" lIns="0" tIns="0" rIns="0" bIns="0" rtlCol="0" anchor="t"/>
           <a:lstStyle/>
           <a:p>
-            <a:pPr rtl="1" algn="r" indent="0" marL="0">
+            <a:pPr marL="0" indent="0" algn="r" rtl="1">
               <a:lnSpc>
                 <a:spcPct val="115000"/>
               </a:lnSpc>
@@ -3677,7 +3548,7 @@
           <a:bodyPr wrap="square" rtlCol="0" anchor="ctr"/>
           <a:lstStyle/>
           <a:p>
-            <a:pPr rtl="1" algn="ctr" indent="0" marL="0">
+            <a:pPr marL="0" indent="0" algn="ctr" rtl="1">
               <a:buNone/>
             </a:pPr>
             <a:r>
@@ -3716,7 +3587,7 @@
           <a:bodyPr wrap="square" lIns="0" tIns="0" rIns="0" bIns="0" rtlCol="0" anchor="ctr"/>
           <a:lstStyle/>
           <a:p>
-            <a:pPr algn="r" indent="0" marL="0">
+            <a:pPr marL="0" indent="0" algn="r">
               <a:buNone/>
             </a:pPr>
             <a:r>
@@ -3755,7 +3626,7 @@
           <a:bodyPr wrap="square" lIns="0" tIns="0" rIns="0" bIns="0" rtlCol="0" anchor="ctr"/>
           <a:lstStyle/>
           <a:p>
-            <a:pPr algn="l" indent="0" marL="0">
+            <a:pPr marL="0" indent="0" algn="l">
               <a:buNone/>
             </a:pPr>
             <a:r>
@@ -3787,7 +3658,7 @@
     <p:bg>
       <p:bgPr>
         <a:blipFill dpi="0" rotWithShape="1">
-          <a:blip r:embed="rId1">
+          <a:blip r:embed="rId3">
             <a:lum/>
           </a:blip>
           <a:srcRect/>
@@ -3831,6 +3702,13 @@
           </a:solidFill>
           <a:ln/>
         </p:spPr>
+        <p:txBody>
+          <a:bodyPr/>
+          <a:lstStyle/>
+          <a:p>
+            <a:endParaRPr lang="en-US"/>
+          </a:p>
+        </p:txBody>
       </p:sp>
       <p:sp>
         <p:nvSpPr>
@@ -3853,7 +3731,7 @@
           <a:bodyPr wrap="square" lIns="0" tIns="0" rIns="0" bIns="0" rtlCol="0" anchor="ctr"/>
           <a:lstStyle/>
           <a:p>
-            <a:pPr rtl="1" algn="ctr" indent="0" marL="0">
+            <a:pPr marL="0" indent="0" algn="ctr" rtl="1">
               <a:buNone/>
             </a:pPr>
             <a:r>
@@ -3892,7 +3770,7 @@
           <a:bodyPr wrap="square" rtlCol="0" anchor="ctr"/>
           <a:lstStyle/>
           <a:p>
-            <a:pPr rtl="1" algn="ctr" indent="0" marL="0">
+            <a:pPr marL="0" indent="0" algn="ctr" rtl="1">
               <a:buNone/>
             </a:pPr>
             <a:r>
@@ -3931,7 +3809,7 @@
           <a:bodyPr wrap="square" rtlCol="0" anchor="t"/>
           <a:lstStyle/>
           <a:p>
-            <a:pPr rtl="1" algn="ctr" indent="0" marL="0">
+            <a:pPr marL="0" indent="0" algn="ctr" rtl="1">
               <a:lnSpc>
                 <a:spcPct val="135000"/>
               </a:lnSpc>
@@ -3974,6 +3852,13 @@
             <a:prstDash val="solid"/>
           </a:ln>
         </p:spPr>
+        <p:txBody>
+          <a:bodyPr/>
+          <a:lstStyle/>
+          <a:p>
+            <a:endParaRPr lang="en-US"/>
+          </a:p>
+        </p:txBody>
       </p:sp>
       <p:sp>
         <p:nvSpPr>
@@ -3996,7 +3881,7 @@
           <a:bodyPr wrap="square" rtlCol="0" anchor="ctr"/>
           <a:lstStyle/>
           <a:p>
-            <a:pPr algn="ctr" indent="0" marL="0">
+            <a:pPr marL="0" indent="0" algn="ctr">
               <a:buNone/>
             </a:pPr>
             <a:r>
@@ -4028,7 +3913,7 @@
     <p:bg>
       <p:bgPr>
         <a:blipFill dpi="0" rotWithShape="1">
-          <a:blip r:embed="rId1">
+          <a:blip r:embed="rId3">
             <a:lum/>
           </a:blip>
           <a:srcRect/>
@@ -4074,7 +3959,7 @@
           <a:bodyPr wrap="square" rtlCol="0" anchor="ctr"/>
           <a:lstStyle/>
           <a:p>
-            <a:pPr rtl="1" algn="ctr" indent="0" marL="0">
+            <a:pPr marL="0" indent="0" algn="ctr" rtl="1">
               <a:buNone/>
             </a:pPr>
             <a:r>
@@ -4113,7 +3998,7 @@
           <a:bodyPr wrap="square" rtlCol="0" anchor="ctr"/>
           <a:lstStyle/>
           <a:p>
-            <a:pPr rtl="1" algn="ctr" indent="0" marL="0">
+            <a:pPr marL="0" indent="0" algn="ctr" rtl="1">
               <a:buNone/>
             </a:pPr>
             <a:r>
@@ -4153,6 +4038,13 @@
             <a:prstDash val="solid"/>
           </a:ln>
         </p:spPr>
+        <p:txBody>
+          <a:bodyPr/>
+          <a:lstStyle/>
+          <a:p>
+            <a:endParaRPr lang="en-US"/>
+          </a:p>
+        </p:txBody>
       </p:sp>
       <p:sp>
         <p:nvSpPr>
@@ -4175,7 +4067,7 @@
           <a:bodyPr wrap="square" rtlCol="0" anchor="ctr"/>
           <a:lstStyle/>
           <a:p>
-            <a:pPr algn="ctr" indent="0" marL="0">
+            <a:pPr marL="0" indent="0" algn="ctr">
               <a:buNone/>
             </a:pPr>
             <a:r>
@@ -4214,11 +4106,11 @@
           <a:bodyPr wrap="square" rtlCol="0" anchor="ctr"/>
           <a:lstStyle/>
           <a:p>
-            <a:pPr algn="ctr" indent="0" marL="0">
-              <a:buNone/>
-            </a:pPr>
-            <a:r>
-              <a:rPr lang="en-US" sz="1300" spc="200" kern="0" dirty="0">
+            <a:pPr marL="0" indent="0" algn="ctr">
+              <a:buNone/>
+            </a:pPr>
+            <a:r>
+              <a:rPr lang="en-US" sz="1300" kern="0" spc="200" dirty="0">
                 <a:solidFill>
                   <a:srgbClr val="93A3B6"/>
                 </a:solidFill>
@@ -4226,7 +4118,7 @@
                 <a:ea typeface="Cambria" pitchFamily="34" charset="-122"/>
                 <a:cs typeface="Cambria" pitchFamily="34" charset="-120"/>
               </a:rPr>
-              <a:t>Yousef Salem  ·  Junior DevOps Engineer</a:t>
+              <a:t>Yousef Salem  DevOps Engineer</a:t>
             </a:r>
             <a:endParaRPr lang="en-US" sz="1300" dirty="0"/>
           </a:p>
@@ -4246,7 +4138,7 @@
     <p:bg>
       <p:bgPr>
         <a:blipFill dpi="0" rotWithShape="1">
-          <a:blip r:embed="rId1">
+          <a:blip r:embed="rId3">
             <a:lum/>
           </a:blip>
           <a:srcRect/>
@@ -4292,7 +4184,7 @@
           <a:bodyPr wrap="square" lIns="0" tIns="0" rIns="0" bIns="0" rtlCol="0" anchor="ctr"/>
           <a:lstStyle/>
           <a:p>
-            <a:pPr rtl="1" algn="r" indent="0" marL="0">
+            <a:pPr marL="0" indent="0" algn="r" rtl="1">
               <a:buNone/>
             </a:pPr>
             <a:r>
@@ -4331,7 +4223,7 @@
           <a:bodyPr wrap="square" rtlCol="0" anchor="ctr"/>
           <a:lstStyle/>
           <a:p>
-            <a:pPr rtl="1" algn="r" indent="0" marL="0">
+            <a:pPr marL="0" indent="0" algn="r" rtl="1">
               <a:buNone/>
             </a:pPr>
             <a:r>
@@ -4370,7 +4262,7 @@
           <a:bodyPr wrap="square" rtlCol="0" anchor="t"/>
           <a:lstStyle/>
           <a:p>
-            <a:pPr rtl="1" algn="r" indent="0" marL="0">
+            <a:pPr marL="0" indent="0" algn="r" rtl="1">
               <a:lnSpc>
                 <a:spcPct val="125000"/>
               </a:lnSpc>
@@ -4417,13 +4309,20 @@
             <a:prstDash val="solid"/>
           </a:ln>
           <a:effectLst>
-            <a:outerShdw sx="100000" sy="100000" kx="0" ky="0" algn="bl" rotWithShape="0" blurRad="114300" dist="38100" dir="5400000">
+            <a:outerShdw blurRad="114300" dist="38100" dir="5400000" algn="bl" rotWithShape="0">
               <a:srgbClr val="000000">
                 <a:alpha val="34000"/>
               </a:srgbClr>
             </a:outerShdw>
           </a:effectLst>
         </p:spPr>
+        <p:txBody>
+          <a:bodyPr/>
+          <a:lstStyle/>
+          <a:p>
+            <a:endParaRPr lang="en-US"/>
+          </a:p>
+        </p:txBody>
       </p:sp>
       <p:sp>
         <p:nvSpPr>
@@ -4444,6 +4343,13 @@
           </a:solidFill>
           <a:ln/>
         </p:spPr>
+        <p:txBody>
+          <a:bodyPr/>
+          <a:lstStyle/>
+          <a:p>
+            <a:endParaRPr lang="en-US"/>
+          </a:p>
+        </p:txBody>
       </p:sp>
       <p:sp>
         <p:nvSpPr>
@@ -4466,7 +4372,7 @@
           <a:bodyPr wrap="square" lIns="0" tIns="0" rIns="0" bIns="0" rtlCol="0" anchor="ctr"/>
           <a:lstStyle/>
           <a:p>
-            <a:pPr rtl="1" algn="r" indent="0" marL="0">
+            <a:pPr marL="0" indent="0" algn="r" rtl="1">
               <a:buNone/>
             </a:pPr>
             <a:r>
@@ -4505,7 +4411,7 @@
           <a:bodyPr wrap="square" lIns="0" tIns="0" rIns="0" bIns="0" rtlCol="0" anchor="t"/>
           <a:lstStyle/>
           <a:p>
-            <a:pPr rtl="1" algn="r" indent="0" marL="0">
+            <a:pPr marL="0" indent="0" algn="r" rtl="1">
               <a:lnSpc>
                 <a:spcPct val="115000"/>
               </a:lnSpc>
@@ -4552,13 +4458,20 @@
             <a:prstDash val="solid"/>
           </a:ln>
           <a:effectLst>
-            <a:outerShdw sx="100000" sy="100000" kx="0" ky="0" algn="bl" rotWithShape="0" blurRad="114300" dist="38100" dir="5400000">
+            <a:outerShdw blurRad="114300" dist="38100" dir="5400000" algn="bl" rotWithShape="0">
               <a:srgbClr val="000000">
                 <a:alpha val="34000"/>
               </a:srgbClr>
             </a:outerShdw>
           </a:effectLst>
         </p:spPr>
+        <p:txBody>
+          <a:bodyPr/>
+          <a:lstStyle/>
+          <a:p>
+            <a:endParaRPr lang="en-US"/>
+          </a:p>
+        </p:txBody>
       </p:sp>
       <p:sp>
         <p:nvSpPr>
@@ -4579,6 +4492,13 @@
           </a:solidFill>
           <a:ln/>
         </p:spPr>
+        <p:txBody>
+          <a:bodyPr/>
+          <a:lstStyle/>
+          <a:p>
+            <a:endParaRPr lang="en-US"/>
+          </a:p>
+        </p:txBody>
       </p:sp>
       <p:sp>
         <p:nvSpPr>
@@ -4601,7 +4521,7 @@
           <a:bodyPr wrap="square" lIns="0" tIns="0" rIns="0" bIns="0" rtlCol="0" anchor="ctr"/>
           <a:lstStyle/>
           <a:p>
-            <a:pPr rtl="1" algn="r" indent="0" marL="0">
+            <a:pPr marL="0" indent="0" algn="r" rtl="1">
               <a:buNone/>
             </a:pPr>
             <a:r>
@@ -4640,7 +4560,7 @@
           <a:bodyPr wrap="square" lIns="0" tIns="0" rIns="0" bIns="0" rtlCol="0" anchor="t"/>
           <a:lstStyle/>
           <a:p>
-            <a:pPr rtl="1" algn="r" indent="0" marL="0">
+            <a:pPr marL="0" indent="0" algn="r" rtl="1">
               <a:lnSpc>
                 <a:spcPct val="115000"/>
               </a:lnSpc>
@@ -4687,13 +4607,20 @@
             <a:prstDash val="solid"/>
           </a:ln>
           <a:effectLst>
-            <a:outerShdw sx="100000" sy="100000" kx="0" ky="0" algn="bl" rotWithShape="0" blurRad="114300" dist="38100" dir="5400000">
+            <a:outerShdw blurRad="114300" dist="38100" dir="5400000" algn="bl" rotWithShape="0">
               <a:srgbClr val="000000">
                 <a:alpha val="34000"/>
               </a:srgbClr>
             </a:outerShdw>
           </a:effectLst>
         </p:spPr>
+        <p:txBody>
+          <a:bodyPr/>
+          <a:lstStyle/>
+          <a:p>
+            <a:endParaRPr lang="en-US"/>
+          </a:p>
+        </p:txBody>
       </p:sp>
       <p:sp>
         <p:nvSpPr>
@@ -4714,6 +4641,13 @@
           </a:solidFill>
           <a:ln/>
         </p:spPr>
+        <p:txBody>
+          <a:bodyPr/>
+          <a:lstStyle/>
+          <a:p>
+            <a:endParaRPr lang="en-US"/>
+          </a:p>
+        </p:txBody>
       </p:sp>
       <p:sp>
         <p:nvSpPr>
@@ -4736,7 +4670,7 @@
           <a:bodyPr wrap="square" lIns="0" tIns="0" rIns="0" bIns="0" rtlCol="0" anchor="ctr"/>
           <a:lstStyle/>
           <a:p>
-            <a:pPr rtl="1" algn="r" indent="0" marL="0">
+            <a:pPr marL="0" indent="0" algn="r" rtl="1">
               <a:buNone/>
             </a:pPr>
             <a:r>
@@ -4775,7 +4709,7 @@
           <a:bodyPr wrap="square" lIns="0" tIns="0" rIns="0" bIns="0" rtlCol="0" anchor="t"/>
           <a:lstStyle/>
           <a:p>
-            <a:pPr rtl="1" algn="r" indent="0" marL="0">
+            <a:pPr marL="0" indent="0" algn="r" rtl="1">
               <a:lnSpc>
                 <a:spcPct val="115000"/>
               </a:lnSpc>
@@ -4822,13 +4756,20 @@
             <a:prstDash val="solid"/>
           </a:ln>
           <a:effectLst>
-            <a:outerShdw sx="100000" sy="100000" kx="0" ky="0" algn="bl" rotWithShape="0" blurRad="114300" dist="38100" dir="5400000">
+            <a:outerShdw blurRad="114300" dist="38100" dir="5400000" algn="bl" rotWithShape="0">
               <a:srgbClr val="000000">
                 <a:alpha val="34000"/>
               </a:srgbClr>
             </a:outerShdw>
           </a:effectLst>
         </p:spPr>
+        <p:txBody>
+          <a:bodyPr/>
+          <a:lstStyle/>
+          <a:p>
+            <a:endParaRPr lang="en-US"/>
+          </a:p>
+        </p:txBody>
       </p:sp>
       <p:sp>
         <p:nvSpPr>
@@ -4849,6 +4790,13 @@
           </a:solidFill>
           <a:ln/>
         </p:spPr>
+        <p:txBody>
+          <a:bodyPr/>
+          <a:lstStyle/>
+          <a:p>
+            <a:endParaRPr lang="en-US"/>
+          </a:p>
+        </p:txBody>
       </p:sp>
       <p:sp>
         <p:nvSpPr>
@@ -4871,7 +4819,7 @@
           <a:bodyPr wrap="square" lIns="0" tIns="0" rIns="0" bIns="0" rtlCol="0" anchor="ctr"/>
           <a:lstStyle/>
           <a:p>
-            <a:pPr rtl="1" algn="r" indent="0" marL="0">
+            <a:pPr marL="0" indent="0" algn="r" rtl="1">
               <a:buNone/>
             </a:pPr>
             <a:r>
@@ -4910,7 +4858,7 @@
           <a:bodyPr wrap="square" lIns="0" tIns="0" rIns="0" bIns="0" rtlCol="0" anchor="t"/>
           <a:lstStyle/>
           <a:p>
-            <a:pPr rtl="1" algn="r" indent="0" marL="0">
+            <a:pPr marL="0" indent="0" algn="r" rtl="1">
               <a:lnSpc>
                 <a:spcPct val="115000"/>
               </a:lnSpc>
@@ -4952,7 +4900,7 @@
           <a:bodyPr wrap="square" lIns="0" tIns="0" rIns="0" bIns="0" rtlCol="0" anchor="ctr"/>
           <a:lstStyle/>
           <a:p>
-            <a:pPr algn="r" indent="0" marL="0">
+            <a:pPr marL="0" indent="0" algn="r">
               <a:buNone/>
             </a:pPr>
             <a:r>
@@ -4991,7 +4939,7 @@
           <a:bodyPr wrap="square" lIns="0" tIns="0" rIns="0" bIns="0" rtlCol="0" anchor="ctr"/>
           <a:lstStyle/>
           <a:p>
-            <a:pPr algn="l" indent="0" marL="0">
+            <a:pPr marL="0" indent="0" algn="l">
               <a:buNone/>
             </a:pPr>
             <a:r>
@@ -5023,7 +4971,7 @@
     <p:bg>
       <p:bgPr>
         <a:blipFill dpi="0" rotWithShape="1">
-          <a:blip r:embed="rId1">
+          <a:blip r:embed="rId3">
             <a:lum/>
           </a:blip>
           <a:srcRect/>
@@ -5069,7 +5017,7 @@
           <a:bodyPr wrap="square" lIns="0" tIns="0" rIns="0" bIns="0" rtlCol="0" anchor="ctr"/>
           <a:lstStyle/>
           <a:p>
-            <a:pPr rtl="1" algn="r" indent="0" marL="0">
+            <a:pPr marL="0" indent="0" algn="r" rtl="1">
               <a:buNone/>
             </a:pPr>
             <a:r>
@@ -5108,7 +5056,7 @@
           <a:bodyPr wrap="square" rtlCol="0" anchor="ctr"/>
           <a:lstStyle/>
           <a:p>
-            <a:pPr rtl="1" algn="r" indent="0" marL="0">
+            <a:pPr marL="0" indent="0" algn="r" rtl="1">
               <a:buNone/>
             </a:pPr>
             <a:r>
@@ -5148,6 +5096,13 @@
             <a:prstDash val="solid"/>
           </a:ln>
         </p:spPr>
+        <p:txBody>
+          <a:bodyPr/>
+          <a:lstStyle/>
+          <a:p>
+            <a:endParaRPr lang="en-US"/>
+          </a:p>
+        </p:txBody>
       </p:sp>
       <p:sp>
         <p:nvSpPr>
@@ -5170,7 +5125,7 @@
           <a:bodyPr wrap="square" lIns="0" tIns="0" rIns="0" bIns="0" rtlCol="0" anchor="ctr"/>
           <a:lstStyle/>
           <a:p>
-            <a:pPr algn="r" indent="0" marL="0">
+            <a:pPr marL="0" indent="0" algn="r">
               <a:buNone/>
             </a:pPr>
             <a:r>
@@ -5209,7 +5164,7 @@
           <a:bodyPr wrap="square" lIns="0" tIns="0" rIns="0" bIns="0" rtlCol="0" anchor="ctr"/>
           <a:lstStyle/>
           <a:p>
-            <a:pPr rtl="1" algn="r" indent="0" marL="0">
+            <a:pPr marL="0" indent="0" algn="r" rtl="1">
               <a:buNone/>
             </a:pPr>
             <a:r>
@@ -5249,6 +5204,13 @@
             <a:prstDash val="solid"/>
           </a:ln>
         </p:spPr>
+        <p:txBody>
+          <a:bodyPr/>
+          <a:lstStyle/>
+          <a:p>
+            <a:endParaRPr lang="en-US"/>
+          </a:p>
+        </p:txBody>
       </p:sp>
       <p:sp>
         <p:nvSpPr>
@@ -5271,7 +5233,7 @@
           <a:bodyPr wrap="square" lIns="0" tIns="0" rIns="0" bIns="0" rtlCol="0" anchor="ctr"/>
           <a:lstStyle/>
           <a:p>
-            <a:pPr algn="r" indent="0" marL="0">
+            <a:pPr marL="0" indent="0" algn="r">
               <a:buNone/>
             </a:pPr>
             <a:r>
@@ -5310,7 +5272,7 @@
           <a:bodyPr wrap="square" lIns="0" tIns="0" rIns="0" bIns="0" rtlCol="0" anchor="ctr"/>
           <a:lstStyle/>
           <a:p>
-            <a:pPr rtl="1" algn="r" indent="0" marL="0">
+            <a:pPr marL="0" indent="0" algn="r" rtl="1">
               <a:buNone/>
             </a:pPr>
             <a:r>
@@ -5350,6 +5312,13 @@
             <a:prstDash val="solid"/>
           </a:ln>
         </p:spPr>
+        <p:txBody>
+          <a:bodyPr/>
+          <a:lstStyle/>
+          <a:p>
+            <a:endParaRPr lang="en-US"/>
+          </a:p>
+        </p:txBody>
       </p:sp>
       <p:sp>
         <p:nvSpPr>
@@ -5372,7 +5341,7 @@
           <a:bodyPr wrap="square" lIns="0" tIns="0" rIns="0" bIns="0" rtlCol="0" anchor="ctr"/>
           <a:lstStyle/>
           <a:p>
-            <a:pPr algn="r" indent="0" marL="0">
+            <a:pPr marL="0" indent="0" algn="r">
               <a:buNone/>
             </a:pPr>
             <a:r>
@@ -5411,7 +5380,7 @@
           <a:bodyPr wrap="square" lIns="0" tIns="0" rIns="0" bIns="0" rtlCol="0" anchor="ctr"/>
           <a:lstStyle/>
           <a:p>
-            <a:pPr rtl="1" algn="r" indent="0" marL="0">
+            <a:pPr marL="0" indent="0" algn="r" rtl="1">
               <a:buNone/>
             </a:pPr>
             <a:r>
@@ -5451,6 +5420,13 @@
             <a:prstDash val="solid"/>
           </a:ln>
         </p:spPr>
+        <p:txBody>
+          <a:bodyPr/>
+          <a:lstStyle/>
+          <a:p>
+            <a:endParaRPr lang="en-US"/>
+          </a:p>
+        </p:txBody>
       </p:sp>
       <p:sp>
         <p:nvSpPr>
@@ -5473,7 +5449,7 @@
           <a:bodyPr wrap="square" lIns="0" tIns="0" rIns="0" bIns="0" rtlCol="0" anchor="ctr"/>
           <a:lstStyle/>
           <a:p>
-            <a:pPr algn="r" indent="0" marL="0">
+            <a:pPr marL="0" indent="0" algn="r">
               <a:buNone/>
             </a:pPr>
             <a:r>
@@ -5512,7 +5488,7 @@
           <a:bodyPr wrap="square" lIns="0" tIns="0" rIns="0" bIns="0" rtlCol="0" anchor="ctr"/>
           <a:lstStyle/>
           <a:p>
-            <a:pPr rtl="1" algn="r" indent="0" marL="0">
+            <a:pPr marL="0" indent="0" algn="r" rtl="1">
               <a:buNone/>
             </a:pPr>
             <a:r>
@@ -5552,6 +5528,13 @@
             <a:prstDash val="solid"/>
           </a:ln>
         </p:spPr>
+        <p:txBody>
+          <a:bodyPr/>
+          <a:lstStyle/>
+          <a:p>
+            <a:endParaRPr lang="en-US"/>
+          </a:p>
+        </p:txBody>
       </p:sp>
       <p:sp>
         <p:nvSpPr>
@@ -5574,7 +5557,7 @@
           <a:bodyPr wrap="square" lIns="0" tIns="0" rIns="0" bIns="0" rtlCol="0" anchor="ctr"/>
           <a:lstStyle/>
           <a:p>
-            <a:pPr algn="r" indent="0" marL="0">
+            <a:pPr marL="0" indent="0" algn="r">
               <a:buNone/>
             </a:pPr>
             <a:r>
@@ -5613,7 +5596,7 @@
           <a:bodyPr wrap="square" lIns="0" tIns="0" rIns="0" bIns="0" rtlCol="0" anchor="ctr"/>
           <a:lstStyle/>
           <a:p>
-            <a:pPr rtl="1" algn="r" indent="0" marL="0">
+            <a:pPr marL="0" indent="0" algn="r" rtl="1">
               <a:buNone/>
             </a:pPr>
             <a:r>
@@ -5653,6 +5636,13 @@
             <a:prstDash val="solid"/>
           </a:ln>
         </p:spPr>
+        <p:txBody>
+          <a:bodyPr/>
+          <a:lstStyle/>
+          <a:p>
+            <a:endParaRPr lang="en-US"/>
+          </a:p>
+        </p:txBody>
       </p:sp>
       <p:sp>
         <p:nvSpPr>
@@ -5675,7 +5665,7 @@
           <a:bodyPr wrap="square" lIns="0" tIns="0" rIns="0" bIns="0" rtlCol="0" anchor="ctr"/>
           <a:lstStyle/>
           <a:p>
-            <a:pPr algn="r" indent="0" marL="0">
+            <a:pPr marL="0" indent="0" algn="r">
               <a:buNone/>
             </a:pPr>
             <a:r>
@@ -5714,7 +5704,7 @@
           <a:bodyPr wrap="square" lIns="0" tIns="0" rIns="0" bIns="0" rtlCol="0" anchor="ctr"/>
           <a:lstStyle/>
           <a:p>
-            <a:pPr rtl="1" algn="r" indent="0" marL="0">
+            <a:pPr marL="0" indent="0" algn="r" rtl="1">
               <a:buNone/>
             </a:pPr>
             <a:r>
@@ -5754,6 +5744,13 @@
             <a:prstDash val="solid"/>
           </a:ln>
         </p:spPr>
+        <p:txBody>
+          <a:bodyPr/>
+          <a:lstStyle/>
+          <a:p>
+            <a:endParaRPr lang="en-US"/>
+          </a:p>
+        </p:txBody>
       </p:sp>
       <p:sp>
         <p:nvSpPr>
@@ -5776,7 +5773,7 @@
           <a:bodyPr wrap="square" lIns="0" tIns="0" rIns="0" bIns="0" rtlCol="0" anchor="ctr"/>
           <a:lstStyle/>
           <a:p>
-            <a:pPr algn="r" indent="0" marL="0">
+            <a:pPr marL="0" indent="0" algn="r">
               <a:buNone/>
             </a:pPr>
             <a:r>
@@ -5815,7 +5812,7 @@
           <a:bodyPr wrap="square" lIns="0" tIns="0" rIns="0" bIns="0" rtlCol="0" anchor="ctr"/>
           <a:lstStyle/>
           <a:p>
-            <a:pPr rtl="1" algn="r" indent="0" marL="0">
+            <a:pPr marL="0" indent="0" algn="r" rtl="1">
               <a:buNone/>
             </a:pPr>
             <a:r>
@@ -5855,6 +5852,13 @@
             <a:prstDash val="solid"/>
           </a:ln>
         </p:spPr>
+        <p:txBody>
+          <a:bodyPr/>
+          <a:lstStyle/>
+          <a:p>
+            <a:endParaRPr lang="en-US"/>
+          </a:p>
+        </p:txBody>
       </p:sp>
       <p:sp>
         <p:nvSpPr>
@@ -5877,7 +5881,7 @@
           <a:bodyPr wrap="square" lIns="0" tIns="0" rIns="0" bIns="0" rtlCol="0" anchor="ctr"/>
           <a:lstStyle/>
           <a:p>
-            <a:pPr algn="r" indent="0" marL="0">
+            <a:pPr marL="0" indent="0" algn="r">
               <a:buNone/>
             </a:pPr>
             <a:r>
@@ -5916,7 +5920,7 @@
           <a:bodyPr wrap="square" lIns="0" tIns="0" rIns="0" bIns="0" rtlCol="0" anchor="ctr"/>
           <a:lstStyle/>
           <a:p>
-            <a:pPr rtl="1" algn="r" indent="0" marL="0">
+            <a:pPr marL="0" indent="0" algn="r" rtl="1">
               <a:buNone/>
             </a:pPr>
             <a:r>
@@ -5955,7 +5959,7 @@
           <a:bodyPr wrap="square" lIns="0" tIns="0" rIns="0" bIns="0" rtlCol="0" anchor="ctr"/>
           <a:lstStyle/>
           <a:p>
-            <a:pPr algn="r" indent="0" marL="0">
+            <a:pPr marL="0" indent="0" algn="r">
               <a:buNone/>
             </a:pPr>
             <a:r>
@@ -5994,7 +5998,7 @@
           <a:bodyPr wrap="square" lIns="0" tIns="0" rIns="0" bIns="0" rtlCol="0" anchor="ctr"/>
           <a:lstStyle/>
           <a:p>
-            <a:pPr algn="l" indent="0" marL="0">
+            <a:pPr marL="0" indent="0" algn="l">
               <a:buNone/>
             </a:pPr>
             <a:r>
@@ -6026,7 +6030,7 @@
     <p:bg>
       <p:bgPr>
         <a:blipFill dpi="0" rotWithShape="1">
-          <a:blip r:embed="rId1">
+          <a:blip r:embed="rId3">
             <a:lum/>
           </a:blip>
           <a:srcRect/>
@@ -6070,6 +6074,13 @@
           </a:solidFill>
           <a:ln/>
         </p:spPr>
+        <p:txBody>
+          <a:bodyPr/>
+          <a:lstStyle/>
+          <a:p>
+            <a:endParaRPr lang="en-US"/>
+          </a:p>
+        </p:txBody>
       </p:sp>
       <p:sp>
         <p:nvSpPr>
@@ -6092,7 +6103,7 @@
           <a:bodyPr wrap="square" lIns="0" tIns="0" rIns="0" bIns="0" rtlCol="0" anchor="ctr"/>
           <a:lstStyle/>
           <a:p>
-            <a:pPr rtl="1" algn="ctr" indent="0" marL="0">
+            <a:pPr marL="0" indent="0" algn="ctr" rtl="1">
               <a:buNone/>
             </a:pPr>
             <a:r>
@@ -6131,7 +6142,7 @@
           <a:bodyPr wrap="square" rtlCol="0" anchor="ctr"/>
           <a:lstStyle/>
           <a:p>
-            <a:pPr rtl="1" algn="ctr" indent="0" marL="0">
+            <a:pPr marL="0" indent="0" algn="ctr" rtl="1">
               <a:lnSpc>
                 <a:spcPct val="120000"/>
               </a:lnSpc>
@@ -6151,7 +6162,7 @@
             <a:endParaRPr lang="en-US" sz="4200" dirty="0"/>
           </a:p>
           <a:p>
-            <a:pPr rtl="1" algn="ctr" indent="0" marL="0">
+            <a:pPr marL="0" indent="0" algn="ctr" rtl="1">
               <a:lnSpc>
                 <a:spcPct val="120000"/>
               </a:lnSpc>
@@ -6193,7 +6204,7 @@
           <a:bodyPr wrap="square" rtlCol="0" anchor="ctr"/>
           <a:lstStyle/>
           <a:p>
-            <a:pPr rtl="1" algn="ctr" indent="0" marL="0">
+            <a:pPr marL="0" indent="0" algn="ctr" rtl="1">
               <a:buNone/>
             </a:pPr>
             <a:r>
@@ -6225,7 +6236,7 @@
     <p:bg>
       <p:bgPr>
         <a:blipFill dpi="0" rotWithShape="1">
-          <a:blip r:embed="rId1">
+          <a:blip r:embed="rId3">
             <a:lum/>
           </a:blip>
           <a:srcRect/>
@@ -6271,7 +6282,7 @@
           <a:bodyPr wrap="square" lIns="0" tIns="0" rIns="0" bIns="0" rtlCol="0" anchor="ctr"/>
           <a:lstStyle/>
           <a:p>
-            <a:pPr rtl="1" algn="r" indent="0" marL="0">
+            <a:pPr marL="0" indent="0" algn="r" rtl="1">
               <a:buNone/>
             </a:pPr>
             <a:r>
@@ -6310,7 +6321,7 @@
           <a:bodyPr wrap="square" rtlCol="0" anchor="ctr"/>
           <a:lstStyle/>
           <a:p>
-            <a:pPr rtl="1" algn="r" indent="0" marL="0">
+            <a:pPr marL="0" indent="0" algn="r" rtl="1">
               <a:buNone/>
             </a:pPr>
             <a:r>
@@ -6354,13 +6365,20 @@
             <a:prstDash val="solid"/>
           </a:ln>
           <a:effectLst>
-            <a:outerShdw sx="100000" sy="100000" kx="0" ky="0" algn="bl" rotWithShape="0" blurRad="114300" dist="38100" dir="5400000">
+            <a:outerShdw blurRad="114300" dist="38100" dir="5400000" algn="bl" rotWithShape="0">
               <a:srgbClr val="000000">
                 <a:alpha val="34000"/>
               </a:srgbClr>
             </a:outerShdw>
           </a:effectLst>
         </p:spPr>
+        <p:txBody>
+          <a:bodyPr/>
+          <a:lstStyle/>
+          <a:p>
+            <a:endParaRPr lang="en-US"/>
+          </a:p>
+        </p:txBody>
       </p:sp>
       <p:sp>
         <p:nvSpPr>
@@ -6383,7 +6401,7 @@
           <a:bodyPr wrap="square" lIns="0" tIns="0" rIns="0" bIns="0" rtlCol="0" anchor="ctr"/>
           <a:lstStyle/>
           <a:p>
-            <a:pPr rtl="1" algn="r" indent="0" marL="0">
+            <a:pPr marL="0" indent="0" algn="r" rtl="1">
               <a:buNone/>
             </a:pPr>
             <a:r>
@@ -6422,7 +6440,7 @@
           <a:bodyPr wrap="square" lIns="0" tIns="0" rIns="0" bIns="0" rtlCol="0" anchor="t"/>
           <a:lstStyle/>
           <a:p>
-            <a:pPr rtl="1" algn="r" indent="0" marL="0">
+            <a:pPr marL="0" indent="0" algn="r" rtl="1">
               <a:lnSpc>
                 <a:spcPct val="130000"/>
               </a:lnSpc>
@@ -6464,7 +6482,7 @@
           <a:bodyPr wrap="square" lIns="0" tIns="0" rIns="0" bIns="0" rtlCol="0" anchor="t"/>
           <a:lstStyle/>
           <a:p>
-            <a:pPr rtl="1" algn="r" indent="0" marL="0">
+            <a:pPr marL="0" indent="0" algn="r" rtl="1">
               <a:buNone/>
             </a:pPr>
             <a:r>
@@ -6504,6 +6522,13 @@
             <a:prstDash val="solid"/>
           </a:ln>
         </p:spPr>
+        <p:txBody>
+          <a:bodyPr/>
+          <a:lstStyle/>
+          <a:p>
+            <a:endParaRPr lang="en-US"/>
+          </a:p>
+        </p:txBody>
       </p:sp>
       <p:sp>
         <p:nvSpPr>
@@ -6526,7 +6551,7 @@
           <a:bodyPr wrap="square" lIns="0" tIns="0" rIns="0" bIns="0" rtlCol="0" anchor="ctr"/>
           <a:lstStyle/>
           <a:p>
-            <a:pPr algn="r" indent="0" marL="0">
+            <a:pPr marL="0" indent="0" algn="r">
               <a:buNone/>
             </a:pPr>
             <a:r>
@@ -6565,7 +6590,7 @@
           <a:bodyPr wrap="square" lIns="0" tIns="0" rIns="0" bIns="0" rtlCol="0" anchor="ctr"/>
           <a:lstStyle/>
           <a:p>
-            <a:pPr rtl="1" algn="r" indent="0" marL="0">
+            <a:pPr marL="0" indent="0" algn="r" rtl="1">
               <a:buNone/>
             </a:pPr>
             <a:r>
@@ -6604,7 +6629,7 @@
           <a:bodyPr wrap="square" lIns="0" tIns="0" rIns="0" bIns="0" rtlCol="0" anchor="ctr"/>
           <a:lstStyle/>
           <a:p>
-            <a:pPr algn="r" indent="0" marL="0">
+            <a:pPr marL="0" indent="0" algn="r">
               <a:buNone/>
             </a:pPr>
             <a:r>
@@ -6643,7 +6668,7 @@
           <a:bodyPr wrap="square" lIns="0" tIns="0" rIns="0" bIns="0" rtlCol="0" anchor="ctr"/>
           <a:lstStyle/>
           <a:p>
-            <a:pPr algn="l" indent="0" marL="0">
+            <a:pPr marL="0" indent="0" algn="l">
               <a:buNone/>
             </a:pPr>
             <a:r>
@@ -6675,7 +6700,7 @@
     <p:bg>
       <p:bgPr>
         <a:blipFill dpi="0" rotWithShape="1">
-          <a:blip r:embed="rId1">
+          <a:blip r:embed="rId3">
             <a:lum/>
           </a:blip>
           <a:srcRect/>
@@ -6721,7 +6746,7 @@
           <a:bodyPr wrap="square" lIns="0" tIns="0" rIns="0" bIns="0" rtlCol="0" anchor="ctr"/>
           <a:lstStyle/>
           <a:p>
-            <a:pPr rtl="1" algn="r" indent="0" marL="0">
+            <a:pPr marL="0" indent="0" algn="r" rtl="1">
               <a:buNone/>
             </a:pPr>
             <a:r>
@@ -6760,7 +6785,7 @@
           <a:bodyPr wrap="square" rtlCol="0" anchor="ctr"/>
           <a:lstStyle/>
           <a:p>
-            <a:pPr rtl="1" algn="r" indent="0" marL="0">
+            <a:pPr marL="0" indent="0" algn="r" rtl="1">
               <a:buNone/>
             </a:pPr>
             <a:r>
@@ -6804,13 +6829,20 @@
             <a:prstDash val="solid"/>
           </a:ln>
           <a:effectLst>
-            <a:outerShdw sx="100000" sy="100000" kx="0" ky="0" algn="bl" rotWithShape="0" blurRad="114300" dist="38100" dir="5400000">
+            <a:outerShdw blurRad="114300" dist="38100" dir="5400000" algn="bl" rotWithShape="0">
               <a:srgbClr val="000000">
                 <a:alpha val="34000"/>
               </a:srgbClr>
             </a:outerShdw>
           </a:effectLst>
         </p:spPr>
+        <p:txBody>
+          <a:bodyPr/>
+          <a:lstStyle/>
+          <a:p>
+            <a:endParaRPr lang="en-US"/>
+          </a:p>
+        </p:txBody>
       </p:sp>
       <p:sp>
         <p:nvSpPr>
@@ -6833,7 +6865,7 @@
           <a:bodyPr wrap="square" lIns="0" tIns="0" rIns="0" bIns="0" rtlCol="0" anchor="ctr"/>
           <a:lstStyle/>
           <a:p>
-            <a:pPr rtl="1" algn="r" indent="0" marL="0">
+            <a:pPr marL="0" indent="0" algn="r" rtl="1">
               <a:buNone/>
             </a:pPr>
             <a:r>
@@ -6872,11 +6904,11 @@
           <a:bodyPr wrap="square" lIns="0" tIns="0" rIns="0" bIns="0" rtlCol="0" anchor="ctr"/>
           <a:lstStyle/>
           <a:p>
-            <a:pPr algn="r" indent="0" marL="0">
-              <a:buNone/>
-            </a:pPr>
-            <a:r>
-              <a:rPr lang="en-US" sz="1200" spc="200" kern="0" dirty="0">
+            <a:pPr marL="0" indent="0" algn="r">
+              <a:buNone/>
+            </a:pPr>
+            <a:r>
+              <a:rPr lang="en-US" sz="1200" kern="0" spc="200" dirty="0">
                 <a:solidFill>
                   <a:srgbClr val="93A3B6"/>
                 </a:solidFill>
@@ -6912,6 +6944,13 @@
             <a:prstDash val="solid"/>
           </a:ln>
         </p:spPr>
+        <p:txBody>
+          <a:bodyPr/>
+          <a:lstStyle/>
+          <a:p>
+            <a:endParaRPr lang="en-US"/>
+          </a:p>
+        </p:txBody>
       </p:sp>
       <p:sp>
         <p:nvSpPr>
@@ -6932,6 +6971,13 @@
           </a:solidFill>
           <a:ln/>
         </p:spPr>
+        <p:txBody>
+          <a:bodyPr/>
+          <a:lstStyle/>
+          <a:p>
+            <a:endParaRPr lang="en-US"/>
+          </a:p>
+        </p:txBody>
       </p:sp>
       <p:sp>
         <p:nvSpPr>
@@ -6954,7 +7000,7 @@
           <a:bodyPr wrap="square" lIns="0" tIns="0" rIns="0" bIns="0" rtlCol="0" anchor="ctr"/>
           <a:lstStyle/>
           <a:p>
-            <a:pPr rtl="1" algn="r" indent="0" marL="0">
+            <a:pPr marL="0" indent="0" algn="r" rtl="1">
               <a:buNone/>
             </a:pPr>
             <a:r>
@@ -6991,6 +7037,13 @@
           </a:solidFill>
           <a:ln/>
         </p:spPr>
+        <p:txBody>
+          <a:bodyPr/>
+          <a:lstStyle/>
+          <a:p>
+            <a:endParaRPr lang="en-US"/>
+          </a:p>
+        </p:txBody>
       </p:sp>
       <p:sp>
         <p:nvSpPr>
@@ -7013,7 +7066,7 @@
           <a:bodyPr wrap="square" lIns="0" tIns="0" rIns="0" bIns="0" rtlCol="0" anchor="ctr"/>
           <a:lstStyle/>
           <a:p>
-            <a:pPr rtl="1" algn="r" indent="0" marL="0">
+            <a:pPr marL="0" indent="0" algn="r" rtl="1">
               <a:buNone/>
             </a:pPr>
             <a:r>
@@ -7057,13 +7110,20 @@
             <a:prstDash val="solid"/>
           </a:ln>
           <a:effectLst>
-            <a:outerShdw sx="100000" sy="100000" kx="0" ky="0" algn="bl" rotWithShape="0" blurRad="114300" dist="38100" dir="5400000">
+            <a:outerShdw blurRad="114300" dist="38100" dir="5400000" algn="bl" rotWithShape="0">
               <a:srgbClr val="000000">
                 <a:alpha val="34000"/>
               </a:srgbClr>
             </a:outerShdw>
           </a:effectLst>
         </p:spPr>
+        <p:txBody>
+          <a:bodyPr/>
+          <a:lstStyle/>
+          <a:p>
+            <a:endParaRPr lang="en-US"/>
+          </a:p>
+        </p:txBody>
       </p:sp>
       <p:sp>
         <p:nvSpPr>
@@ -7086,7 +7146,7 @@
           <a:bodyPr wrap="square" lIns="0" tIns="0" rIns="0" bIns="0" rtlCol="0" anchor="ctr"/>
           <a:lstStyle/>
           <a:p>
-            <a:pPr rtl="1" algn="r" indent="0" marL="0">
+            <a:pPr marL="0" indent="0" algn="r" rtl="1">
               <a:buNone/>
             </a:pPr>
             <a:r>
@@ -7125,11 +7185,11 @@
           <a:bodyPr wrap="square" lIns="0" tIns="0" rIns="0" bIns="0" rtlCol="0" anchor="ctr"/>
           <a:lstStyle/>
           <a:p>
-            <a:pPr algn="r" indent="0" marL="0">
-              <a:buNone/>
-            </a:pPr>
-            <a:r>
-              <a:rPr lang="en-US" sz="1200" spc="200" kern="0" dirty="0">
+            <a:pPr marL="0" indent="0" algn="r">
+              <a:buNone/>
+            </a:pPr>
+            <a:r>
+              <a:rPr lang="en-US" sz="1200" kern="0" spc="200" dirty="0">
                 <a:solidFill>
                   <a:srgbClr val="93A3B6"/>
                 </a:solidFill>
@@ -7165,6 +7225,13 @@
             <a:prstDash val="solid"/>
           </a:ln>
         </p:spPr>
+        <p:txBody>
+          <a:bodyPr/>
+          <a:lstStyle/>
+          <a:p>
+            <a:endParaRPr lang="en-US"/>
+          </a:p>
+        </p:txBody>
       </p:sp>
       <p:sp>
         <p:nvSpPr>
@@ -7185,6 +7252,13 @@
           </a:solidFill>
           <a:ln/>
         </p:spPr>
+        <p:txBody>
+          <a:bodyPr/>
+          <a:lstStyle/>
+          <a:p>
+            <a:endParaRPr lang="en-US"/>
+          </a:p>
+        </p:txBody>
       </p:sp>
       <p:sp>
         <p:nvSpPr>
@@ -7207,7 +7281,7 @@
           <a:bodyPr wrap="square" lIns="0" tIns="0" rIns="0" bIns="0" rtlCol="0" anchor="ctr"/>
           <a:lstStyle/>
           <a:p>
-            <a:pPr rtl="1" algn="r" indent="0" marL="0">
+            <a:pPr marL="0" indent="0" algn="r" rtl="1">
               <a:buNone/>
             </a:pPr>
             <a:r>
@@ -7244,6 +7318,13 @@
           </a:solidFill>
           <a:ln/>
         </p:spPr>
+        <p:txBody>
+          <a:bodyPr/>
+          <a:lstStyle/>
+          <a:p>
+            <a:endParaRPr lang="en-US"/>
+          </a:p>
+        </p:txBody>
       </p:sp>
       <p:sp>
         <p:nvSpPr>
@@ -7266,7 +7347,7 @@
           <a:bodyPr wrap="square" lIns="0" tIns="0" rIns="0" bIns="0" rtlCol="0" anchor="ctr"/>
           <a:lstStyle/>
           <a:p>
-            <a:pPr rtl="1" algn="r" indent="0" marL="0">
+            <a:pPr marL="0" indent="0" algn="r" rtl="1">
               <a:buNone/>
             </a:pPr>
             <a:r>
@@ -7310,13 +7391,20 @@
             <a:prstDash val="solid"/>
           </a:ln>
           <a:effectLst>
-            <a:outerShdw sx="100000" sy="100000" kx="0" ky="0" algn="bl" rotWithShape="0" blurRad="114300" dist="38100" dir="5400000">
+            <a:outerShdw blurRad="114300" dist="38100" dir="5400000" algn="bl" rotWithShape="0">
               <a:srgbClr val="000000">
                 <a:alpha val="34000"/>
               </a:srgbClr>
             </a:outerShdw>
           </a:effectLst>
         </p:spPr>
+        <p:txBody>
+          <a:bodyPr/>
+          <a:lstStyle/>
+          <a:p>
+            <a:endParaRPr lang="en-US"/>
+          </a:p>
+        </p:txBody>
       </p:sp>
       <p:sp>
         <p:nvSpPr>
@@ -7339,7 +7427,7 @@
           <a:bodyPr wrap="square" lIns="0" tIns="0" rIns="0" bIns="0" rtlCol="0" anchor="ctr"/>
           <a:lstStyle/>
           <a:p>
-            <a:pPr rtl="1" algn="r" indent="0" marL="0">
+            <a:pPr marL="0" indent="0" algn="r" rtl="1">
               <a:buNone/>
             </a:pPr>
             <a:r>
@@ -7378,11 +7466,11 @@
           <a:bodyPr wrap="square" lIns="0" tIns="0" rIns="0" bIns="0" rtlCol="0" anchor="ctr"/>
           <a:lstStyle/>
           <a:p>
-            <a:pPr algn="r" indent="0" marL="0">
-              <a:buNone/>
-            </a:pPr>
-            <a:r>
-              <a:rPr lang="en-US" sz="1200" spc="200" kern="0" dirty="0">
+            <a:pPr marL="0" indent="0" algn="r">
+              <a:buNone/>
+            </a:pPr>
+            <a:r>
+              <a:rPr lang="en-US" sz="1200" kern="0" spc="200" dirty="0">
                 <a:solidFill>
                   <a:srgbClr val="93A3B6"/>
                 </a:solidFill>
@@ -7418,6 +7506,13 @@
             <a:prstDash val="solid"/>
           </a:ln>
         </p:spPr>
+        <p:txBody>
+          <a:bodyPr/>
+          <a:lstStyle/>
+          <a:p>
+            <a:endParaRPr lang="en-US"/>
+          </a:p>
+        </p:txBody>
       </p:sp>
       <p:sp>
         <p:nvSpPr>
@@ -7438,6 +7533,13 @@
           </a:solidFill>
           <a:ln/>
         </p:spPr>
+        <p:txBody>
+          <a:bodyPr/>
+          <a:lstStyle/>
+          <a:p>
+            <a:endParaRPr lang="en-US"/>
+          </a:p>
+        </p:txBody>
       </p:sp>
       <p:sp>
         <p:nvSpPr>
@@ -7460,7 +7562,7 @@
           <a:bodyPr wrap="square" lIns="0" tIns="0" rIns="0" bIns="0" rtlCol="0" anchor="ctr"/>
           <a:lstStyle/>
           <a:p>
-            <a:pPr rtl="1" algn="r" indent="0" marL="0">
+            <a:pPr marL="0" indent="0" algn="r" rtl="1">
               <a:buNone/>
             </a:pPr>
             <a:r>
@@ -7499,7 +7601,7 @@
           <a:bodyPr wrap="square" lIns="0" tIns="0" rIns="0" bIns="0" rtlCol="0" anchor="ctr"/>
           <a:lstStyle/>
           <a:p>
-            <a:pPr algn="r" indent="0" marL="0">
+            <a:pPr marL="0" indent="0" algn="r">
               <a:buNone/>
             </a:pPr>
             <a:r>
@@ -7538,7 +7640,7 @@
           <a:bodyPr wrap="square" lIns="0" tIns="0" rIns="0" bIns="0" rtlCol="0" anchor="ctr"/>
           <a:lstStyle/>
           <a:p>
-            <a:pPr algn="l" indent="0" marL="0">
+            <a:pPr marL="0" indent="0" algn="l">
               <a:buNone/>
             </a:pPr>
             <a:r>
@@ -7570,7 +7672,7 @@
     <p:bg>
       <p:bgPr>
         <a:blipFill dpi="0" rotWithShape="1">
-          <a:blip r:embed="rId1">
+          <a:blip r:embed="rId3">
             <a:lum/>
           </a:blip>
           <a:srcRect/>
@@ -7616,7 +7718,7 @@
           <a:bodyPr wrap="square" lIns="0" tIns="0" rIns="0" bIns="0" rtlCol="0" anchor="ctr"/>
           <a:lstStyle/>
           <a:p>
-            <a:pPr rtl="1" algn="r" indent="0" marL="0">
+            <a:pPr marL="0" indent="0" algn="r" rtl="1">
               <a:buNone/>
             </a:pPr>
             <a:r>
@@ -7655,7 +7757,7 @@
           <a:bodyPr wrap="square" rtlCol="0" anchor="ctr"/>
           <a:lstStyle/>
           <a:p>
-            <a:pPr algn="r" indent="0" marL="0">
+            <a:pPr marL="0" indent="0" algn="r">
               <a:buNone/>
             </a:pPr>
             <a:r>
@@ -7694,7 +7796,7 @@
           <a:bodyPr wrap="square" rtlCol="0" anchor="t"/>
           <a:lstStyle/>
           <a:p>
-            <a:pPr rtl="1" algn="r" indent="0" marL="0">
+            <a:pPr marL="0" indent="0" algn="r" rtl="1">
               <a:lnSpc>
                 <a:spcPct val="135000"/>
               </a:lnSpc>
@@ -7741,13 +7843,20 @@
             <a:prstDash val="solid"/>
           </a:ln>
           <a:effectLst>
-            <a:outerShdw sx="100000" sy="100000" kx="0" ky="0" algn="bl" rotWithShape="0" blurRad="114300" dist="38100" dir="5400000">
+            <a:outerShdw blurRad="114300" dist="38100" dir="5400000" algn="bl" rotWithShape="0">
               <a:srgbClr val="000000">
                 <a:alpha val="34000"/>
               </a:srgbClr>
             </a:outerShdw>
           </a:effectLst>
         </p:spPr>
+        <p:txBody>
+          <a:bodyPr/>
+          <a:lstStyle/>
+          <a:p>
+            <a:endParaRPr lang="en-US"/>
+          </a:p>
+        </p:txBody>
       </p:sp>
       <p:sp>
         <p:nvSpPr>
@@ -7768,6 +7877,13 @@
           </a:solidFill>
           <a:ln/>
         </p:spPr>
+        <p:txBody>
+          <a:bodyPr/>
+          <a:lstStyle/>
+          <a:p>
+            <a:endParaRPr lang="en-US"/>
+          </a:p>
+        </p:txBody>
       </p:sp>
       <p:sp>
         <p:nvSpPr>
@@ -7790,7 +7906,7 @@
           <a:bodyPr wrap="square" lIns="0" tIns="0" rIns="0" bIns="0" rtlCol="0" anchor="ctr"/>
           <a:lstStyle/>
           <a:p>
-            <a:pPr rtl="1" algn="ctr" indent="0" marL="0">
+            <a:pPr marL="0" indent="0" algn="ctr" rtl="1">
               <a:buNone/>
             </a:pPr>
             <a:r>
@@ -7829,7 +7945,7 @@
           <a:bodyPr wrap="square" lIns="0" tIns="0" rIns="0" bIns="0" rtlCol="0" anchor="t"/>
           <a:lstStyle/>
           <a:p>
-            <a:pPr rtl="1" algn="ctr" indent="0" marL="0">
+            <a:pPr marL="0" indent="0" algn="ctr" rtl="1">
               <a:lnSpc>
                 <a:spcPct val="120000"/>
               </a:lnSpc>
@@ -7872,6 +7988,13 @@
             <a:prstDash val="solid"/>
           </a:ln>
         </p:spPr>
+        <p:txBody>
+          <a:bodyPr/>
+          <a:lstStyle/>
+          <a:p>
+            <a:endParaRPr lang="en-US"/>
+          </a:p>
+        </p:txBody>
       </p:sp>
       <p:sp>
         <p:nvSpPr>
@@ -7894,7 +8017,7 @@
           <a:bodyPr wrap="square" lIns="0" tIns="0" rIns="0" bIns="0" rtlCol="0" anchor="ctr"/>
           <a:lstStyle/>
           <a:p>
-            <a:pPr rtl="1" algn="ctr" indent="0" marL="0">
+            <a:pPr marL="0" indent="0" algn="ctr" rtl="1">
               <a:buNone/>
             </a:pPr>
             <a:r>
@@ -7933,7 +8056,7 @@
           <a:bodyPr wrap="square" lIns="0" tIns="0" rIns="0" bIns="0" rtlCol="0" anchor="ctr"/>
           <a:lstStyle/>
           <a:p>
-            <a:pPr rtl="1" algn="ctr" indent="0" marL="0">
+            <a:pPr marL="0" indent="0" algn="ctr" rtl="1">
               <a:buNone/>
             </a:pPr>
             <a:r>
@@ -7972,7 +8095,7 @@
           <a:bodyPr wrap="square" lIns="0" tIns="0" rIns="0" bIns="0" rtlCol="0" anchor="ctr"/>
           <a:lstStyle/>
           <a:p>
-            <a:pPr algn="r" indent="0" marL="0">
+            <a:pPr marL="0" indent="0" algn="r">
               <a:buNone/>
             </a:pPr>
             <a:r>
@@ -8011,7 +8134,7 @@
           <a:bodyPr wrap="square" lIns="0" tIns="0" rIns="0" bIns="0" rtlCol="0" anchor="ctr"/>
           <a:lstStyle/>
           <a:p>
-            <a:pPr algn="l" indent="0" marL="0">
+            <a:pPr marL="0" indent="0" algn="l">
               <a:buNone/>
             </a:pPr>
             <a:r>
@@ -8043,7 +8166,7 @@
     <p:bg>
       <p:bgPr>
         <a:blipFill dpi="0" rotWithShape="1">
-          <a:blip r:embed="rId1">
+          <a:blip r:embed="rId3">
             <a:lum/>
           </a:blip>
           <a:srcRect/>
@@ -8089,7 +8212,7 @@
           <a:bodyPr wrap="square" lIns="0" tIns="0" rIns="0" bIns="0" rtlCol="0" anchor="ctr"/>
           <a:lstStyle/>
           <a:p>
-            <a:pPr rtl="1" algn="r" indent="0" marL="0">
+            <a:pPr marL="0" indent="0" algn="r" rtl="1">
               <a:buNone/>
             </a:pPr>
             <a:r>
@@ -8128,7 +8251,7 @@
           <a:bodyPr wrap="square" rtlCol="0" anchor="ctr"/>
           <a:lstStyle/>
           <a:p>
-            <a:pPr rtl="1" algn="r" indent="0" marL="0">
+            <a:pPr marL="0" indent="0" algn="r" rtl="1">
               <a:buNone/>
             </a:pPr>
             <a:r>
@@ -8167,7 +8290,7 @@
           <a:bodyPr wrap="square" rtlCol="0" anchor="t"/>
           <a:lstStyle/>
           <a:p>
-            <a:pPr rtl="1" algn="r" indent="0" marL="0">
+            <a:pPr marL="0" indent="0" algn="r" rtl="1">
               <a:lnSpc>
                 <a:spcPct val="130000"/>
               </a:lnSpc>
@@ -8209,7 +8332,7 @@
           <a:bodyPr wrap="square" rtlCol="0" anchor="t"/>
           <a:lstStyle/>
           <a:p>
-            <a:pPr rtl="1" algn="r" indent="0" marL="0">
+            <a:pPr marL="0" indent="0" algn="r" rtl="1">
               <a:lnSpc>
                 <a:spcPct val="130000"/>
               </a:lnSpc>
@@ -8256,6 +8379,13 @@
             <a:prstDash val="solid"/>
           </a:ln>
         </p:spPr>
+        <p:txBody>
+          <a:bodyPr/>
+          <a:lstStyle/>
+          <a:p>
+            <a:endParaRPr lang="en-US"/>
+          </a:p>
+        </p:txBody>
       </p:sp>
       <p:sp>
         <p:nvSpPr>
@@ -8276,6 +8406,13 @@
           </a:solidFill>
           <a:ln/>
         </p:spPr>
+        <p:txBody>
+          <a:bodyPr/>
+          <a:lstStyle/>
+          <a:p>
+            <a:endParaRPr lang="en-US"/>
+          </a:p>
+        </p:txBody>
       </p:sp>
       <p:sp>
         <p:nvSpPr>
@@ -8298,7 +8435,7 @@
           <a:bodyPr wrap="square" lIns="0" tIns="0" rIns="0" bIns="0" rtlCol="0" anchor="ctr"/>
           <a:lstStyle/>
           <a:p>
-            <a:pPr rtl="1" algn="r" indent="0" marL="0">
+            <a:pPr marL="0" indent="0" algn="r" rtl="1">
               <a:buNone/>
             </a:pPr>
             <a:r>
@@ -8342,6 +8479,13 @@
             <a:prstDash val="solid"/>
           </a:ln>
         </p:spPr>
+        <p:txBody>
+          <a:bodyPr/>
+          <a:lstStyle/>
+          <a:p>
+            <a:endParaRPr lang="en-US"/>
+          </a:p>
+        </p:txBody>
       </p:sp>
       <p:sp>
         <p:nvSpPr>
@@ -8362,6 +8506,13 @@
           </a:solidFill>
           <a:ln/>
         </p:spPr>
+        <p:txBody>
+          <a:bodyPr/>
+          <a:lstStyle/>
+          <a:p>
+            <a:endParaRPr lang="en-US"/>
+          </a:p>
+        </p:txBody>
       </p:sp>
       <p:sp>
         <p:nvSpPr>
@@ -8384,7 +8535,7 @@
           <a:bodyPr wrap="square" lIns="0" tIns="0" rIns="0" bIns="0" rtlCol="0" anchor="ctr"/>
           <a:lstStyle/>
           <a:p>
-            <a:pPr rtl="1" algn="r" indent="0" marL="0">
+            <a:pPr marL="0" indent="0" algn="r" rtl="1">
               <a:buNone/>
             </a:pPr>
             <a:r>
@@ -8428,6 +8579,13 @@
             <a:prstDash val="solid"/>
           </a:ln>
         </p:spPr>
+        <p:txBody>
+          <a:bodyPr/>
+          <a:lstStyle/>
+          <a:p>
+            <a:endParaRPr lang="en-US"/>
+          </a:p>
+        </p:txBody>
       </p:sp>
       <p:sp>
         <p:nvSpPr>
@@ -8448,6 +8606,13 @@
           </a:solidFill>
           <a:ln/>
         </p:spPr>
+        <p:txBody>
+          <a:bodyPr/>
+          <a:lstStyle/>
+          <a:p>
+            <a:endParaRPr lang="en-US"/>
+          </a:p>
+        </p:txBody>
       </p:sp>
       <p:sp>
         <p:nvSpPr>
@@ -8470,7 +8635,7 @@
           <a:bodyPr wrap="square" lIns="0" tIns="0" rIns="0" bIns="0" rtlCol="0" anchor="ctr"/>
           <a:lstStyle/>
           <a:p>
-            <a:pPr rtl="1" algn="r" indent="0" marL="0">
+            <a:pPr marL="0" indent="0" algn="r" rtl="1">
               <a:buNone/>
             </a:pPr>
             <a:r>
@@ -8514,6 +8679,13 @@
             <a:prstDash val="solid"/>
           </a:ln>
         </p:spPr>
+        <p:txBody>
+          <a:bodyPr/>
+          <a:lstStyle/>
+          <a:p>
+            <a:endParaRPr lang="en-US"/>
+          </a:p>
+        </p:txBody>
       </p:sp>
       <p:sp>
         <p:nvSpPr>
@@ -8534,6 +8706,13 @@
           </a:solidFill>
           <a:ln/>
         </p:spPr>
+        <p:txBody>
+          <a:bodyPr/>
+          <a:lstStyle/>
+          <a:p>
+            <a:endParaRPr lang="en-US"/>
+          </a:p>
+        </p:txBody>
       </p:sp>
       <p:sp>
         <p:nvSpPr>
@@ -8556,7 +8735,7 @@
           <a:bodyPr wrap="square" lIns="0" tIns="0" rIns="0" bIns="0" rtlCol="0" anchor="ctr"/>
           <a:lstStyle/>
           <a:p>
-            <a:pPr rtl="1" algn="r" indent="0" marL="0">
+            <a:pPr marL="0" indent="0" algn="r" rtl="1">
               <a:buNone/>
             </a:pPr>
             <a:r>
@@ -8600,6 +8779,13 @@
             <a:prstDash val="solid"/>
           </a:ln>
         </p:spPr>
+        <p:txBody>
+          <a:bodyPr/>
+          <a:lstStyle/>
+          <a:p>
+            <a:endParaRPr lang="en-US"/>
+          </a:p>
+        </p:txBody>
       </p:sp>
       <p:sp>
         <p:nvSpPr>
@@ -8620,6 +8806,13 @@
           </a:solidFill>
           <a:ln/>
         </p:spPr>
+        <p:txBody>
+          <a:bodyPr/>
+          <a:lstStyle/>
+          <a:p>
+            <a:endParaRPr lang="en-US"/>
+          </a:p>
+        </p:txBody>
       </p:sp>
       <p:sp>
         <p:nvSpPr>
@@ -8642,7 +8835,7 @@
           <a:bodyPr wrap="square" lIns="0" tIns="0" rIns="0" bIns="0" rtlCol="0" anchor="ctr"/>
           <a:lstStyle/>
           <a:p>
-            <a:pPr rtl="1" algn="r" indent="0" marL="0">
+            <a:pPr marL="0" indent="0" algn="r" rtl="1">
               <a:buNone/>
             </a:pPr>
             <a:r>
@@ -8681,7 +8874,7 @@
           <a:bodyPr wrap="square" lIns="0" tIns="0" rIns="0" bIns="0" rtlCol="0" anchor="ctr"/>
           <a:lstStyle/>
           <a:p>
-            <a:pPr algn="r" indent="0" marL="0">
+            <a:pPr marL="0" indent="0" algn="r">
               <a:buNone/>
             </a:pPr>
             <a:r>
@@ -8720,7 +8913,7 @@
           <a:bodyPr wrap="square" lIns="0" tIns="0" rIns="0" bIns="0" rtlCol="0" anchor="ctr"/>
           <a:lstStyle/>
           <a:p>
-            <a:pPr algn="l" indent="0" marL="0">
+            <a:pPr marL="0" indent="0" algn="l">
               <a:buNone/>
             </a:pPr>
             <a:r>
@@ -8752,7 +8945,7 @@
     <p:bg>
       <p:bgPr>
         <a:blipFill dpi="0" rotWithShape="1">
-          <a:blip r:embed="rId1">
+          <a:blip r:embed="rId3">
             <a:lum/>
           </a:blip>
           <a:srcRect/>
@@ -8798,7 +8991,7 @@
           <a:bodyPr wrap="square" lIns="0" tIns="0" rIns="0" bIns="0" rtlCol="0" anchor="ctr"/>
           <a:lstStyle/>
           <a:p>
-            <a:pPr rtl="1" algn="r" indent="0" marL="0">
+            <a:pPr marL="0" indent="0" algn="r" rtl="1">
               <a:buNone/>
             </a:pPr>
             <a:r>
@@ -8837,7 +9030,7 @@
           <a:bodyPr wrap="square" rtlCol="0" anchor="ctr"/>
           <a:lstStyle/>
           <a:p>
-            <a:pPr rtl="1" algn="r" indent="0" marL="0">
+            <a:pPr marL="0" indent="0" algn="r" rtl="1">
               <a:buNone/>
             </a:pPr>
             <a:r>
@@ -8881,13 +9074,20 @@
             <a:prstDash val="solid"/>
           </a:ln>
           <a:effectLst>
-            <a:outerShdw sx="100000" sy="100000" kx="0" ky="0" algn="bl" rotWithShape="0" blurRad="114300" dist="38100" dir="5400000">
+            <a:outerShdw blurRad="114300" dist="38100" dir="5400000" algn="bl" rotWithShape="0">
               <a:srgbClr val="000000">
                 <a:alpha val="34000"/>
               </a:srgbClr>
             </a:outerShdw>
           </a:effectLst>
         </p:spPr>
+        <p:txBody>
+          <a:bodyPr/>
+          <a:lstStyle/>
+          <a:p>
+            <a:endParaRPr lang="en-US"/>
+          </a:p>
+        </p:txBody>
       </p:sp>
       <p:sp>
         <p:nvSpPr>
@@ -8910,7 +9110,7 @@
           <a:bodyPr wrap="square" lIns="0" tIns="0" rIns="0" bIns="0" rtlCol="0" anchor="ctr"/>
           <a:lstStyle/>
           <a:p>
-            <a:pPr algn="ctr" indent="0" marL="0">
+            <a:pPr marL="0" indent="0" algn="ctr">
               <a:buNone/>
             </a:pPr>
             <a:r>
@@ -8950,6 +9150,13 @@
             <a:prstDash val="solid"/>
           </a:ln>
         </p:spPr>
+        <p:txBody>
+          <a:bodyPr/>
+          <a:lstStyle/>
+          <a:p>
+            <a:endParaRPr lang="en-US"/>
+          </a:p>
+        </p:txBody>
       </p:sp>
       <p:sp>
         <p:nvSpPr>
@@ -8972,7 +9179,7 @@
           <a:bodyPr wrap="square" lIns="0" tIns="0" rIns="0" bIns="0" rtlCol="0" anchor="t"/>
           <a:lstStyle/>
           <a:p>
-            <a:pPr rtl="1" algn="ctr" indent="0" marL="0">
+            <a:pPr marL="0" indent="0" algn="ctr" rtl="1">
               <a:lnSpc>
                 <a:spcPct val="115000"/>
               </a:lnSpc>
@@ -9019,13 +9226,20 @@
             <a:prstDash val="solid"/>
           </a:ln>
           <a:effectLst>
-            <a:outerShdw sx="100000" sy="100000" kx="0" ky="0" algn="bl" rotWithShape="0" blurRad="114300" dist="38100" dir="5400000">
+            <a:outerShdw blurRad="114300" dist="38100" dir="5400000" algn="bl" rotWithShape="0">
               <a:srgbClr val="000000">
                 <a:alpha val="34000"/>
               </a:srgbClr>
             </a:outerShdw>
           </a:effectLst>
         </p:spPr>
+        <p:txBody>
+          <a:bodyPr/>
+          <a:lstStyle/>
+          <a:p>
+            <a:endParaRPr lang="en-US"/>
+          </a:p>
+        </p:txBody>
       </p:sp>
       <p:sp>
         <p:nvSpPr>
@@ -9048,7 +9262,7 @@
           <a:bodyPr wrap="square" lIns="0" tIns="0" rIns="0" bIns="0" rtlCol="0" anchor="ctr"/>
           <a:lstStyle/>
           <a:p>
-            <a:pPr algn="ctr" indent="0" marL="0">
+            <a:pPr marL="0" indent="0" algn="ctr">
               <a:buNone/>
             </a:pPr>
             <a:r>
@@ -9088,6 +9302,13 @@
             <a:prstDash val="solid"/>
           </a:ln>
         </p:spPr>
+        <p:txBody>
+          <a:bodyPr/>
+          <a:lstStyle/>
+          <a:p>
+            <a:endParaRPr lang="en-US"/>
+          </a:p>
+        </p:txBody>
       </p:sp>
       <p:sp>
         <p:nvSpPr>
@@ -9110,7 +9331,7 @@
           <a:bodyPr wrap="square" lIns="0" tIns="0" rIns="0" bIns="0" rtlCol="0" anchor="t"/>
           <a:lstStyle/>
           <a:p>
-            <a:pPr rtl="1" algn="ctr" indent="0" marL="0">
+            <a:pPr marL="0" indent="0" algn="ctr" rtl="1">
               <a:lnSpc>
                 <a:spcPct val="115000"/>
               </a:lnSpc>
@@ -9157,13 +9378,20 @@
             <a:prstDash val="solid"/>
           </a:ln>
           <a:effectLst>
-            <a:outerShdw sx="100000" sy="100000" kx="0" ky="0" algn="bl" rotWithShape="0" blurRad="114300" dist="38100" dir="5400000">
+            <a:outerShdw blurRad="114300" dist="38100" dir="5400000" algn="bl" rotWithShape="0">
               <a:srgbClr val="000000">
                 <a:alpha val="34000"/>
               </a:srgbClr>
             </a:outerShdw>
           </a:effectLst>
         </p:spPr>
+        <p:txBody>
+          <a:bodyPr/>
+          <a:lstStyle/>
+          <a:p>
+            <a:endParaRPr lang="en-US"/>
+          </a:p>
+        </p:txBody>
       </p:sp>
       <p:sp>
         <p:nvSpPr>
@@ -9186,7 +9414,7 @@
           <a:bodyPr wrap="square" lIns="0" tIns="0" rIns="0" bIns="0" rtlCol="0" anchor="ctr"/>
           <a:lstStyle/>
           <a:p>
-            <a:pPr algn="ctr" indent="0" marL="0">
+            <a:pPr marL="0" indent="0" algn="ctr">
               <a:buNone/>
             </a:pPr>
             <a:r>
@@ -9226,6 +9454,13 @@
             <a:prstDash val="solid"/>
           </a:ln>
         </p:spPr>
+        <p:txBody>
+          <a:bodyPr/>
+          <a:lstStyle/>
+          <a:p>
+            <a:endParaRPr lang="en-US"/>
+          </a:p>
+        </p:txBody>
       </p:sp>
       <p:sp>
         <p:nvSpPr>
@@ -9248,7 +9483,7 @@
           <a:bodyPr wrap="square" lIns="0" tIns="0" rIns="0" bIns="0" rtlCol="0" anchor="t"/>
           <a:lstStyle/>
           <a:p>
-            <a:pPr rtl="1" algn="ctr" indent="0" marL="0">
+            <a:pPr marL="0" indent="0" algn="ctr" rtl="1">
               <a:lnSpc>
                 <a:spcPct val="115000"/>
               </a:lnSpc>
@@ -9295,13 +9530,20 @@
             <a:prstDash val="solid"/>
           </a:ln>
           <a:effectLst>
-            <a:outerShdw sx="100000" sy="100000" kx="0" ky="0" algn="bl" rotWithShape="0" blurRad="114300" dist="38100" dir="5400000">
+            <a:outerShdw blurRad="114300" dist="38100" dir="5400000" algn="bl" rotWithShape="0">
               <a:srgbClr val="000000">
                 <a:alpha val="34000"/>
               </a:srgbClr>
             </a:outerShdw>
           </a:effectLst>
         </p:spPr>
+        <p:txBody>
+          <a:bodyPr/>
+          <a:lstStyle/>
+          <a:p>
+            <a:endParaRPr lang="en-US"/>
+          </a:p>
+        </p:txBody>
       </p:sp>
       <p:sp>
         <p:nvSpPr>
@@ -9324,7 +9566,7 @@
           <a:bodyPr wrap="square" lIns="0" tIns="0" rIns="0" bIns="0" rtlCol="0" anchor="ctr"/>
           <a:lstStyle/>
           <a:p>
-            <a:pPr algn="ctr" indent="0" marL="0">
+            <a:pPr marL="0" indent="0" algn="ctr">
               <a:buNone/>
             </a:pPr>
             <a:r>
@@ -9364,6 +9606,13 @@
             <a:prstDash val="solid"/>
           </a:ln>
         </p:spPr>
+        <p:txBody>
+          <a:bodyPr/>
+          <a:lstStyle/>
+          <a:p>
+            <a:endParaRPr lang="en-US"/>
+          </a:p>
+        </p:txBody>
       </p:sp>
       <p:sp>
         <p:nvSpPr>
@@ -9386,7 +9635,7 @@
           <a:bodyPr wrap="square" lIns="0" tIns="0" rIns="0" bIns="0" rtlCol="0" anchor="t"/>
           <a:lstStyle/>
           <a:p>
-            <a:pPr rtl="1" algn="ctr" indent="0" marL="0">
+            <a:pPr marL="0" indent="0" algn="ctr" rtl="1">
               <a:lnSpc>
                 <a:spcPct val="115000"/>
               </a:lnSpc>
@@ -9428,7 +9677,7 @@
           <a:bodyPr wrap="square" lIns="0" tIns="0" rIns="0" bIns="0" rtlCol="0" anchor="ctr"/>
           <a:lstStyle/>
           <a:p>
-            <a:pPr algn="r" indent="0" marL="0">
+            <a:pPr marL="0" indent="0" algn="r">
               <a:buNone/>
             </a:pPr>
             <a:r>
@@ -9467,7 +9716,7 @@
           <a:bodyPr wrap="square" lIns="0" tIns="0" rIns="0" bIns="0" rtlCol="0" anchor="ctr"/>
           <a:lstStyle/>
           <a:p>
-            <a:pPr algn="l" indent="0" marL="0">
+            <a:pPr marL="0" indent="0" algn="l">
               <a:buNone/>
             </a:pPr>
             <a:r>
@@ -9786,4 +10035,319 @@
     </a:ext>
   </a:extLst>
 </a:theme>
+</file>
+
+<file path=ppt/theme/theme2.xml><?xml version="1.0" encoding="utf-8"?>
+<a:theme xmlns:a="http://schemas.openxmlformats.org/drawingml/2006/main" name="Office Theme">
+  <a:themeElements>
+    <a:clrScheme name="Office">
+      <a:dk1>
+        <a:sysClr val="windowText" lastClr="000000"/>
+      </a:dk1>
+      <a:lt1>
+        <a:sysClr val="window" lastClr="FFFFFF"/>
+      </a:lt1>
+      <a:dk2>
+        <a:srgbClr val="0E2841"/>
+      </a:dk2>
+      <a:lt2>
+        <a:srgbClr val="E8E8E8"/>
+      </a:lt2>
+      <a:accent1>
+        <a:srgbClr val="156082"/>
+      </a:accent1>
+      <a:accent2>
+        <a:srgbClr val="E97132"/>
+      </a:accent2>
+      <a:accent3>
+        <a:srgbClr val="196B24"/>
+      </a:accent3>
+      <a:accent4>
+        <a:srgbClr val="0F9ED5"/>
+      </a:accent4>
+      <a:accent5>
+        <a:srgbClr val="A02B93"/>
+      </a:accent5>
+      <a:accent6>
+        <a:srgbClr val="4EA72E"/>
+      </a:accent6>
+      <a:hlink>
+        <a:srgbClr val="467886"/>
+      </a:hlink>
+      <a:folHlink>
+        <a:srgbClr val="96607D"/>
+      </a:folHlink>
+    </a:clrScheme>
+    <a:fontScheme name="Office">
+      <a:majorFont>
+        <a:latin typeface="Aptos Display" panose="02110004020202020204"/>
+        <a:ea typeface=""/>
+        <a:cs typeface=""/>
+        <a:font script="Jpan" typeface="游ゴシック Light"/>
+        <a:font script="Hang" typeface="맑은 고딕"/>
+        <a:font script="Hans" typeface="等线 Light"/>
+        <a:font script="Hant" typeface="新細明體"/>
+        <a:font script="Arab" typeface="Times New Roman"/>
+        <a:font script="Hebr" typeface="Times New Roman"/>
+        <a:font script="Thai" typeface="Angsana New"/>
+        <a:font script="Ethi" typeface="Nyala"/>
+        <a:font script="Beng" typeface="Vrinda"/>
+        <a:font script="Gujr" typeface="Shruti"/>
+        <a:font script="Khmr" typeface="MoolBoran"/>
+        <a:font script="Knda" typeface="Tunga"/>
+        <a:font script="Guru" typeface="Raavi"/>
+        <a:font script="Cans" typeface="Euphemia"/>
+        <a:font script="Cher" typeface="Plantagenet Cherokee"/>
+        <a:font script="Yiii" typeface="Microsoft Yi Baiti"/>
+        <a:font script="Tibt" typeface="Microsoft Himalaya"/>
+        <a:font script="Thaa" typeface="MV Boli"/>
+        <a:font script="Deva" typeface="Mangal"/>
+        <a:font script="Telu" typeface="Gautami"/>
+        <a:font script="Taml" typeface="Latha"/>
+        <a:font script="Syrc" typeface="Estrangelo Edessa"/>
+        <a:font script="Orya" typeface="Kalinga"/>
+        <a:font script="Mlym" typeface="Kartika"/>
+        <a:font script="Laoo" typeface="DokChampa"/>
+        <a:font script="Sinh" typeface="Iskoola Pota"/>
+        <a:font script="Mong" typeface="Mongolian Baiti"/>
+        <a:font script="Viet" typeface="Times New Roman"/>
+        <a:font script="Uigh" typeface="Microsoft Uighur"/>
+        <a:font script="Geor" typeface="Sylfaen"/>
+        <a:font script="Armn" typeface="Arial"/>
+        <a:font script="Bugi" typeface="Leelawadee UI"/>
+        <a:font script="Bopo" typeface="Microsoft JhengHei"/>
+        <a:font script="Java" typeface="Javanese Text"/>
+        <a:font script="Lisu" typeface="Segoe UI"/>
+        <a:font script="Mymr" typeface="Myanmar Text"/>
+        <a:font script="Nkoo" typeface="Ebrima"/>
+        <a:font script="Olck" typeface="Nirmala UI"/>
+        <a:font script="Osma" typeface="Ebrima"/>
+        <a:font script="Phag" typeface="Phagspa"/>
+        <a:font script="Syrn" typeface="Estrangelo Edessa"/>
+        <a:font script="Syrj" typeface="Estrangelo Edessa"/>
+        <a:font script="Syre" typeface="Estrangelo Edessa"/>
+        <a:font script="Sora" typeface="Nirmala UI"/>
+        <a:font script="Tale" typeface="Microsoft Tai Le"/>
+        <a:font script="Talu" typeface="Microsoft New Tai Lue"/>
+        <a:font script="Tfng" typeface="Ebrima"/>
+      </a:majorFont>
+      <a:minorFont>
+        <a:latin typeface="Aptos" panose="02110004020202020204"/>
+        <a:ea typeface=""/>
+        <a:cs typeface=""/>
+        <a:font script="Jpan" typeface="游ゴシック"/>
+        <a:font script="Hang" typeface="맑은 고딕"/>
+        <a:font script="Hans" typeface="等线"/>
+        <a:font script="Hant" typeface="新細明體"/>
+        <a:font script="Arab" typeface="Arial"/>
+        <a:font script="Hebr" typeface="Arial"/>
+        <a:font script="Thai" typeface="Cordia New"/>
+        <a:font script="Ethi" typeface="Nyala"/>
+        <a:font script="Beng" typeface="Vrinda"/>
+        <a:font script="Gujr" typeface="Shruti"/>
+        <a:font script="Khmr" typeface="DaunPenh"/>
+        <a:font script="Knda" typeface="Tunga"/>
+        <a:font script="Guru" typeface="Raavi"/>
+        <a:font script="Cans" typeface="Euphemia"/>
+        <a:font script="Cher" typeface="Plantagenet Cherokee"/>
+        <a:font script="Yiii" typeface="Microsoft Yi Baiti"/>
+        <a:font script="Tibt" typeface="Microsoft Himalaya"/>
+        <a:font script="Thaa" typeface="MV Boli"/>
+        <a:font script="Deva" typeface="Mangal"/>
+        <a:font script="Telu" typeface="Gautami"/>
+        <a:font script="Taml" typeface="Latha"/>
+        <a:font script="Syrc" typeface="Estrangelo Edessa"/>
+        <a:font script="Orya" typeface="Kalinga"/>
+        <a:font script="Mlym" typeface="Kartika"/>
+        <a:font script="Laoo" typeface="DokChampa"/>
+        <a:font script="Sinh" typeface="Iskoola Pota"/>
+        <a:font script="Mong" typeface="Mongolian Baiti"/>
+        <a:font script="Viet" typeface="Arial"/>
+        <a:font script="Uigh" typeface="Microsoft Uighur"/>
+        <a:font script="Geor" typeface="Sylfaen"/>
+        <a:font script="Armn" typeface="Arial"/>
+        <a:font script="Bugi" typeface="Leelawadee UI"/>
+        <a:font script="Bopo" typeface="Microsoft JhengHei"/>
+        <a:font script="Java" typeface="Javanese Text"/>
+        <a:font script="Lisu" typeface="Segoe UI"/>
+        <a:font script="Mymr" typeface="Myanmar Text"/>
+        <a:font script="Nkoo" typeface="Ebrima"/>
+        <a:font script="Olck" typeface="Nirmala UI"/>
+        <a:font script="Osma" typeface="Ebrima"/>
+        <a:font script="Phag" typeface="Phagspa"/>
+        <a:font script="Syrn" typeface="Estrangelo Edessa"/>
+        <a:font script="Syrj" typeface="Estrangelo Edessa"/>
+        <a:font script="Syre" typeface="Estrangelo Edessa"/>
+        <a:font script="Sora" typeface="Nirmala UI"/>
+        <a:font script="Tale" typeface="Microsoft Tai Le"/>
+        <a:font script="Talu" typeface="Microsoft New Tai Lue"/>
+        <a:font script="Tfng" typeface="Ebrima"/>
+      </a:minorFont>
+    </a:fontScheme>
+    <a:fmtScheme name="Office">
+      <a:fillStyleLst>
+        <a:solidFill>
+          <a:schemeClr val="phClr"/>
+        </a:solidFill>
+        <a:gradFill rotWithShape="1">
+          <a:gsLst>
+            <a:gs pos="0">
+              <a:schemeClr val="phClr">
+                <a:lumMod val="110000"/>
+                <a:satMod val="105000"/>
+                <a:tint val="67000"/>
+              </a:schemeClr>
+            </a:gs>
+            <a:gs pos="50000">
+              <a:schemeClr val="phClr">
+                <a:lumMod val="105000"/>
+                <a:satMod val="103000"/>
+                <a:tint val="73000"/>
+              </a:schemeClr>
+            </a:gs>
+            <a:gs pos="100000">
+              <a:schemeClr val="phClr">
+                <a:lumMod val="105000"/>
+                <a:satMod val="109000"/>
+                <a:tint val="81000"/>
+              </a:schemeClr>
+            </a:gs>
+          </a:gsLst>
+          <a:lin ang="5400000" scaled="0"/>
+        </a:gradFill>
+        <a:gradFill rotWithShape="1">
+          <a:gsLst>
+            <a:gs pos="0">
+              <a:schemeClr val="phClr">
+                <a:satMod val="103000"/>
+                <a:lumMod val="102000"/>
+                <a:tint val="94000"/>
+              </a:schemeClr>
+            </a:gs>
+            <a:gs pos="50000">
+              <a:schemeClr val="phClr">
+                <a:satMod val="110000"/>
+                <a:lumMod val="100000"/>
+                <a:shade val="100000"/>
+              </a:schemeClr>
+            </a:gs>
+            <a:gs pos="100000">
+              <a:schemeClr val="phClr">
+                <a:lumMod val="99000"/>
+                <a:satMod val="120000"/>
+                <a:shade val="78000"/>
+              </a:schemeClr>
+            </a:gs>
+          </a:gsLst>
+          <a:lin ang="5400000" scaled="0"/>
+        </a:gradFill>
+      </a:fillStyleLst>
+      <a:lnStyleLst>
+        <a:ln w="12700" cap="flat" cmpd="sng" algn="ctr">
+          <a:solidFill>
+            <a:schemeClr val="phClr"/>
+          </a:solidFill>
+          <a:prstDash val="solid"/>
+          <a:miter lim="800000"/>
+        </a:ln>
+        <a:ln w="19050" cap="flat" cmpd="sng" algn="ctr">
+          <a:solidFill>
+            <a:schemeClr val="phClr"/>
+          </a:solidFill>
+          <a:prstDash val="solid"/>
+          <a:miter lim="800000"/>
+        </a:ln>
+        <a:ln w="25400" cap="flat" cmpd="sng" algn="ctr">
+          <a:solidFill>
+            <a:schemeClr val="phClr"/>
+          </a:solidFill>
+          <a:prstDash val="solid"/>
+          <a:miter lim="800000"/>
+        </a:ln>
+      </a:lnStyleLst>
+      <a:effectStyleLst>
+        <a:effectStyle>
+          <a:effectLst/>
+        </a:effectStyle>
+        <a:effectStyle>
+          <a:effectLst/>
+        </a:effectStyle>
+        <a:effectStyle>
+          <a:effectLst>
+            <a:outerShdw blurRad="57150" dist="19050" dir="5400000" algn="ctr" rotWithShape="0">
+              <a:srgbClr val="000000">
+                <a:alpha val="63000"/>
+              </a:srgbClr>
+            </a:outerShdw>
+          </a:effectLst>
+        </a:effectStyle>
+      </a:effectStyleLst>
+      <a:bgFillStyleLst>
+        <a:solidFill>
+          <a:schemeClr val="phClr"/>
+        </a:solidFill>
+        <a:solidFill>
+          <a:schemeClr val="phClr">
+            <a:tint val="95000"/>
+            <a:satMod val="170000"/>
+          </a:schemeClr>
+        </a:solidFill>
+        <a:gradFill rotWithShape="1">
+          <a:gsLst>
+            <a:gs pos="0">
+              <a:schemeClr val="phClr">
+                <a:tint val="93000"/>
+                <a:satMod val="150000"/>
+                <a:shade val="98000"/>
+                <a:lumMod val="102000"/>
+              </a:schemeClr>
+            </a:gs>
+            <a:gs pos="50000">
+              <a:schemeClr val="phClr">
+                <a:tint val="98000"/>
+                <a:satMod val="130000"/>
+                <a:shade val="90000"/>
+                <a:lumMod val="103000"/>
+              </a:schemeClr>
+            </a:gs>
+            <a:gs pos="100000">
+              <a:schemeClr val="phClr">
+                <a:shade val="63000"/>
+                <a:satMod val="120000"/>
+              </a:schemeClr>
+            </a:gs>
+          </a:gsLst>
+          <a:lin ang="5400000" scaled="0"/>
+        </a:gradFill>
+      </a:bgFillStyleLst>
+    </a:fmtScheme>
+  </a:themeElements>
+  <a:objectDefaults>
+    <a:lnDef>
+      <a:spPr/>
+      <a:bodyPr/>
+      <a:lstStyle/>
+      <a:style>
+        <a:lnRef idx="2">
+          <a:schemeClr val="accent1"/>
+        </a:lnRef>
+        <a:fillRef idx="0">
+          <a:schemeClr val="accent1"/>
+        </a:fillRef>
+        <a:effectRef idx="1">
+          <a:schemeClr val="accent1"/>
+        </a:effectRef>
+        <a:fontRef idx="minor">
+          <a:schemeClr val="tx1"/>
+        </a:fontRef>
+      </a:style>
+    </a:lnDef>
+  </a:objectDefaults>
+  <a:extraClrSchemeLst/>
+  <a:extLst>
+    <a:ext uri="{05A4C25C-085E-4340-85A3-A5531E510DB2}">
+      <thm15:themeFamily xmlns:thm15="http://schemas.microsoft.com/office/thememl/2012/main" name="Office Theme" id="{2E142A2C-CD16-42D6-873A-C26D2A0506FA}" vid="{1BDDFF52-6CD6-40A5-AB3C-68EB2F1E4D0A}"/>
+    </a:ext>
+  </a:extLst>
+</a:theme>
 </file>